--- a/plyometrics/⑤プライオメトリクス講義スライド.pptx
+++ b/plyometrics/⑤プライオメトリクス講義スライド.pptx
@@ -3227,7 +3227,7 @@
                 </a:solidFill>
                 <a:latin typeface="Meiryo"/>
               </a:rPr>
-              <a:t>NSCA S&amp;C教本 第18章</a:t>
+              <a:t>S&amp;C領域</a:t>
             </a:r>
           </a:p>
         </p:txBody>
@@ -23437,7 +23437,7 @@
                 </a:solidFill>
                 <a:latin typeface="Meiryo"/>
               </a:rPr>
-              <a:t>本章の学習目標</a:t>
+              <a:t>本講義の学習目標</a:t>
             </a:r>
           </a:p>
         </p:txBody>

--- a/plyometrics/⑤プライオメトリクス講義スライド.pptx
+++ b/plyometrics/⑤プライオメトリクス講義スライド.pptx
@@ -3275,7 +3275,7 @@
         </p:nvSpPr>
         <p:spPr>
           <a:xfrm>
-            <a:off x="457200" y="3017520"/>
+            <a:off x="457200" y="3337560"/>
             <a:ext cx="11274552" cy="640080"/>
           </a:xfrm>
           <a:prstGeom prst="rect">
@@ -3310,7 +3310,7 @@
         </p:nvSpPr>
         <p:spPr>
           <a:xfrm>
-            <a:off x="2286000" y="3840480"/>
+            <a:off x="2286000" y="4023360"/>
             <a:ext cx="7616952" cy="54864"/>
           </a:xfrm>
           <a:prstGeom prst="rect">
@@ -3355,7 +3355,7 @@
         </p:nvSpPr>
         <p:spPr>
           <a:xfrm>
-            <a:off x="457200" y="3931920"/>
+            <a:off x="457200" y="4114800"/>
             <a:ext cx="11274552" cy="457200"/>
           </a:xfrm>
           <a:prstGeom prst="rect">
@@ -3901,8 +3901,8 @@
                 </a:solidFill>
                 <a:latin typeface="Meiryo"/>
               </a:rPr>
-              <a:t>足首の素早い動き
-膝はほとんど使わない</a:t>
+              <a:t>主に足関節で
+連続して跳ぶ</a:t>
             </a:r>
           </a:p>
         </p:txBody>
@@ -3967,7 +3967,7 @@
             <a:avLst/>
           </a:prstGeom>
           <a:solidFill>
-            <a:srgbClr val="27AE60"/>
+            <a:srgbClr val="F39C12"/>
           </a:solidFill>
           <a:ln>
             <a:solidFill>
@@ -4062,7 +4062,7 @@
                 </a:solidFill>
                 <a:latin typeface="Meiryo"/>
               </a:rPr>
-              <a:t>低</a:t>
+              <a:t>中</a:t>
             </a:r>
           </a:p>
         </p:txBody>
@@ -4133,8 +4133,8 @@
                 </a:solidFill>
                 <a:latin typeface="Meiryo"/>
               </a:rPr>
-              <a:t>片脚バランスと
-足首強化</a:t>
+              <a:t>片脚で主に足関節を
+使って連続ホップ</a:t>
             </a:r>
           </a:p>
         </p:txBody>
@@ -4365,8 +4365,8 @@
                 </a:solidFill>
                 <a:latin typeface="Meiryo"/>
               </a:rPr>
-              <a:t>スクワット姿勢から
-最大高さへ</a:t>
+              <a:t>反動なしでスクワット
+姿勢から高く跳ぶ</a:t>
             </a:r>
           </a:p>
         </p:txBody>
@@ -4597,8 +4597,8 @@
                 </a:solidFill>
                 <a:latin typeface="Meiryo"/>
               </a:rPr>
-              <a:t>目標にタッチする
-ように跳ぶ</a:t>
+              <a:t>頂点で目標に
+タッチする</a:t>
             </a:r>
           </a:p>
         </p:txBody>
@@ -4793,8 +4793,8 @@
                 </a:solidFill>
                 <a:latin typeface="Meiryo"/>
               </a:rPr>
-              <a:t>タック
-ジャンプ</a:t>
+              <a:t>ダブルレッグ
+タックジャンプ</a:t>
             </a:r>
           </a:p>
         </p:txBody>
@@ -4829,8 +4829,8 @@
                 </a:solidFill>
                 <a:latin typeface="Meiryo"/>
               </a:rPr>
-              <a:t>空中で膝を
-胸に引き寄せる</a:t>
+              <a:t>膝を胸に引きつけ
+着地前に離す</a:t>
             </a:r>
           </a:p>
         </p:txBody>
@@ -5061,8 +5061,8 @@
                 </a:solidFill>
                 <a:latin typeface="Meiryo"/>
               </a:rPr>
-              <a:t>脚を前後に開いた
-状態から跳ぶ</a:t>
+              <a:t>ランジ姿勢から跳び
+同じ脚を前に着地</a:t>
             </a:r>
           </a:p>
         </p:txBody>
@@ -5257,8 +5257,8 @@
                 </a:solidFill>
                 <a:latin typeface="Meiryo"/>
               </a:rPr>
-              <a:t>サイクルド
-スプリットジャンプ</a:t>
+              <a:t>サイクルド・スプリット
+スクワットジャンプ</a:t>
             </a:r>
           </a:p>
         </p:txBody>
@@ -5525,8 +5525,8 @@
                 </a:solidFill>
                 <a:latin typeface="Meiryo"/>
               </a:rPr>
-              <a:t>片脚で最大高さへ
-膝を引き寄せる</a:t>
+              <a:t>片脚で跳び
+膝を引きつける</a:t>
             </a:r>
           </a:p>
         </p:txBody>
@@ -5721,7 +5721,7 @@
                 </a:solidFill>
                 <a:latin typeface="Meiryo"/>
               </a:rPr>
-              <a:t>バイク
+              <a:t>パイク
 ジャンプ</a:t>
             </a:r>
           </a:p>
@@ -5757,8 +5757,8 @@
                 </a:solidFill>
                 <a:latin typeface="Meiryo"/>
               </a:rPr>
-              <a:t>空中で自転車
-こぎ動作</a:t>
+              <a:t>脚を伸ばしたまま上げ
+つま先にタッチ</a:t>
             </a:r>
           </a:p>
         </p:txBody>
@@ -5981,7 +5981,7 @@
                 </a:solidFill>
                 <a:latin typeface="Meiryo"/>
               </a:rPr>
-              <a:t>Standing Jumps &amp; Hops</a:t>
+              <a:t>Standing Jumps（低〜高） &amp; Multiple Hops and Jumps（中〜高）</a:t>
             </a:r>
           </a:p>
         </p:txBody>
@@ -6046,7 +6046,7 @@
             <a:avLst/>
           </a:prstGeom>
           <a:solidFill>
-            <a:srgbClr val="F39C12"/>
+            <a:srgbClr val="27AE60"/>
           </a:solidFill>
           <a:ln>
             <a:solidFill>
@@ -6141,7 +6141,7 @@
                 </a:solidFill>
                 <a:latin typeface="Meiryo"/>
               </a:rPr>
-              <a:t>中</a:t>
+              <a:t>低</a:t>
             </a:r>
           </a:p>
         </p:txBody>
@@ -6212,8 +6212,8 @@
                 </a:solidFill>
                 <a:latin typeface="Meiryo"/>
               </a:rPr>
-              <a:t>最大高さを目指す
-反動から開始</a:t>
+              <a:t>目標へ最大努力
+ジャンプ間に回復</a:t>
             </a:r>
           </a:p>
         </p:txBody>
@@ -6444,7 +6444,8 @@
                 </a:solidFill>
                 <a:latin typeface="Meiryo"/>
               </a:rPr>
-              <a:t>片脚で最大高さへ</a:t>
+              <a:t>片脚で目標へ
+ジャンプ間に回復</a:t>
             </a:r>
           </a:p>
         </p:txBody>
@@ -6509,7 +6510,7 @@
             <a:avLst/>
           </a:prstGeom>
           <a:solidFill>
-            <a:srgbClr val="E74C3C"/>
+            <a:srgbClr val="F39C12"/>
           </a:solidFill>
           <a:ln>
             <a:solidFill>
@@ -6604,7 +6605,7 @@
                 </a:solidFill>
                 <a:latin typeface="Meiryo"/>
               </a:rPr>
-              <a:t>高</a:t>
+              <a:t>中</a:t>
             </a:r>
           </a:p>
         </p:txBody>
@@ -6675,8 +6676,8 @@
                 </a:solidFill>
                 <a:latin typeface="Meiryo"/>
               </a:rPr>
-              <a:t>前進しながら
-障害物を越える</a:t>
+              <a:t>両脚で越える
+コーン→ハードルへ</a:t>
             </a:r>
           </a:p>
         </p:txBody>
@@ -6741,7 +6742,7 @@
             <a:avLst/>
           </a:prstGeom>
           <a:solidFill>
-            <a:srgbClr val="F39C12"/>
+            <a:srgbClr val="27AE60"/>
           </a:solidFill>
           <a:ln>
             <a:solidFill>
@@ -6836,7 +6837,7 @@
                 </a:solidFill>
                 <a:latin typeface="Meiryo"/>
               </a:rPr>
-              <a:t>中</a:t>
+              <a:t>低</a:t>
             </a:r>
           </a:p>
         </p:txBody>
@@ -6906,8 +6907,8 @@
                 </a:solidFill>
                 <a:latin typeface="Meiryo"/>
               </a:rPr>
-              <a:t>前方への
-最大距離ジャンプ</a:t>
+              <a:t>腕振りを使い
+前方へ最大距離</a:t>
             </a:r>
           </a:p>
         </p:txBody>
@@ -7138,8 +7139,8 @@
                 </a:solidFill>
                 <a:latin typeface="Meiryo"/>
               </a:rPr>
-              <a:t>連続して前方へ
-できるだけ素早く</a:t>
+              <a:t>前方へ大きく跳び
+ただちに繰り返す</a:t>
             </a:r>
           </a:p>
         </p:txBody>
@@ -7334,8 +7335,8 @@
                 </a:solidFill>
                 <a:latin typeface="Meiryo"/>
               </a:rPr>
-              <a:t>ジグザグ
-ホップ</a:t>
+              <a:t>ダブルレッグ
+ジグザグホップ</a:t>
             </a:r>
           </a:p>
         </p:txBody>
@@ -7370,8 +7371,8 @@
                 </a:solidFill>
                 <a:latin typeface="Meiryo"/>
               </a:rPr>
-              <a:t>10個のハードルを
-ジグザグで越える</a:t>
+              <a:t>ハードル約10個を
+ジグザグに斜めへ</a:t>
             </a:r>
           </a:p>
         </p:txBody>
@@ -7602,8 +7603,8 @@
                 </a:solidFill>
                 <a:latin typeface="Meiryo"/>
               </a:rPr>
-              <a:t>片脚で連続
-短い接地時間</a:t>
+              <a:t>片脚で前方へ
+同じ脚で着地</a:t>
             </a:r>
           </a:p>
         </p:txBody>
@@ -7834,8 +7835,8 @@
                 </a:solidFill>
                 <a:latin typeface="Meiryo"/>
               </a:rPr>
-              <a:t>障害物を前方から
-越えて連続</a:t>
+              <a:t>前方の障害物を
+連続で越える</a:t>
             </a:r>
           </a:p>
         </p:txBody>
@@ -8066,8 +8067,8 @@
                 </a:solidFill>
                 <a:latin typeface="Meiryo"/>
               </a:rPr>
-              <a:t>横方向に障害物を
-越えて連続</a:t>
+              <a:t>障害物を横に
+越えて往復</a:t>
             </a:r>
           </a:p>
         </p:txBody>
@@ -8298,8 +8299,8 @@
                 </a:solidFill>
                 <a:latin typeface="Meiryo"/>
               </a:rPr>
-              <a:t>4つのハードルを
-連続で越える</a:t>
+              <a:t>片脚で側方へ
+ハードルを越える</a:t>
             </a:r>
           </a:p>
         </p:txBody>
@@ -8522,7 +8523,7 @@
                 </a:solidFill>
                 <a:latin typeface="Meiryo"/>
               </a:rPr>
-              <a:t>Bounds  |  強度：低〜高</a:t>
+              <a:t>Bounds  |  強度：低〜中</a:t>
             </a:r>
           </a:p>
         </p:txBody>
@@ -8752,8 +8753,8 @@
                 </a:solidFill>
                 <a:latin typeface="Meiryo"/>
               </a:rPr>
-              <a:t>片足踏み込みと
-ジャンプの組み合わせ</a:t>
+              <a:t>片脚で上・前方へ
+同じ脚で着地</a:t>
             </a:r>
           </a:p>
         </p:txBody>
@@ -8818,7 +8819,7 @@
             <a:avLst/>
           </a:prstGeom>
           <a:solidFill>
-            <a:srgbClr val="F39C12"/>
+            <a:srgbClr val="27AE60"/>
           </a:solidFill>
           <a:ln>
             <a:solidFill>
@@ -8913,7 +8914,7 @@
                 </a:solidFill>
                 <a:latin typeface="Meiryo"/>
               </a:rPr>
-              <a:t>中</a:t>
+              <a:t>低</a:t>
             </a:r>
           </a:p>
         </p:txBody>
@@ -8983,8 +8984,8 @@
                 </a:solidFill>
                 <a:latin typeface="Meiryo"/>
               </a:rPr>
-              <a:t>最大高さと距離を
-狙うスキップ</a:t>
+              <a:t>反対脚を大きく
+引き上げる</a:t>
             </a:r>
           </a:p>
         </p:txBody>
@@ -9049,7 +9050,7 @@
             <a:avLst/>
           </a:prstGeom>
           <a:solidFill>
-            <a:srgbClr val="F39C12"/>
+            <a:srgbClr val="27AE60"/>
           </a:solidFill>
           <a:ln>
             <a:solidFill>
@@ -9144,7 +9145,7 @@
                 </a:solidFill>
                 <a:latin typeface="Meiryo"/>
               </a:rPr>
-              <a:t>中</a:t>
+              <a:t>低</a:t>
             </a:r>
           </a:p>
         </p:txBody>
@@ -9215,7 +9216,7 @@
                 </a:solidFill>
                 <a:latin typeface="Meiryo"/>
               </a:rPr>
-              <a:t>後ろ方向への
+              <a:t>後方への
 スキップ</a:t>
             </a:r>
           </a:p>
@@ -9446,8 +9447,8 @@
                 </a:solidFill>
                 <a:latin typeface="Meiryo"/>
               </a:rPr>
-              <a:t>側方へのスキップ
-横方向のパワー強化</a:t>
+              <a:t>上方・側方への
+スキップ</a:t>
             </a:r>
           </a:p>
         </p:txBody>
@@ -9678,8 +9679,8 @@
                 </a:solidFill>
                 <a:latin typeface="Meiryo"/>
               </a:rPr>
-              <a:t>片腕のスイングで
-推進力を高める</a:t>
+              <a:t>片腕を前へ
+1歩を大きく</a:t>
             </a:r>
           </a:p>
         </p:txBody>
@@ -9744,7 +9745,7 @@
             <a:avLst/>
           </a:prstGeom>
           <a:solidFill>
-            <a:srgbClr val="E74C3C"/>
+            <a:srgbClr val="F39C12"/>
           </a:solidFill>
           <a:ln>
             <a:solidFill>
@@ -9839,7 +9840,7 @@
                 </a:solidFill>
                 <a:latin typeface="Meiryo"/>
               </a:rPr>
-              <a:t>高</a:t>
+              <a:t>中</a:t>
             </a:r>
           </a:p>
         </p:txBody>
@@ -9910,8 +9911,8 @@
                 </a:solidFill>
                 <a:latin typeface="Meiryo"/>
               </a:rPr>
-              <a:t>両腕スイングで
-最大の推進力</a:t>
+              <a:t>両腕を前へ
+1歩を大きく</a:t>
             </a:r>
           </a:p>
         </p:txBody>
@@ -10036,7 +10037,7 @@
                 </a:solidFill>
                 <a:latin typeface="Meiryo"/>
               </a:rPr>
-              <a:t>バウンドとスプリントの関係</a:t>
+              <a:t>バウンドの特徴</a:t>
             </a:r>
           </a:p>
         </p:txBody>
@@ -10071,9 +10072,9 @@
                 </a:solidFill>
                 <a:latin typeface="Meiryo"/>
               </a:rPr>
-              <a:t>● バウンドはランニング動作に近い爆発的な下肢動作を強化する
-● スプリントに必要な地面反力・ストライド幅の向上につながる
-● スポーツのアジリティ・方向転換能力とも関連が深い</a:t>
+              <a:t>● ほかのドリルより水平方向のスピードを強調した動き（ランニング動作を強調）
+● 量は距離で数えるのが一般的（例：ダブルレッグ・バウンドを30mから始めて100mへ）
+● 通常30m以上の直線で行う</a:t>
             </a:r>
           </a:p>
         </p:txBody>
@@ -10296,7 +10297,7 @@
                 </a:solidFill>
                 <a:latin typeface="Meiryo"/>
               </a:rPr>
-              <a:t>Box Drills  |  強度：中〜高</a:t>
+              <a:t>Box Drills  |  強度：低〜高　※最初は低い高さ（15cm、ドロップフリーズは30cm）から</a:t>
             </a:r>
           </a:p>
         </p:txBody>
@@ -10310,7 +10311,7 @@
         <p:spPr>
           <a:xfrm>
             <a:off x="228600" y="1417320"/>
-            <a:ext cx="2834640" cy="2331720"/>
+            <a:ext cx="2240280" cy="2331720"/>
           </a:xfrm>
           <a:prstGeom prst="rect">
             <a:avLst/>
@@ -10355,13 +10356,13 @@
         <p:spPr>
           <a:xfrm>
             <a:off x="228600" y="1417320"/>
-            <a:ext cx="2834640" cy="384048"/>
-          </a:xfrm>
-          <a:prstGeom prst="rect">
-            <a:avLst/>
-          </a:prstGeom>
-          <a:solidFill>
-            <a:srgbClr val="F39C12"/>
+            <a:ext cx="2240280" cy="365760"/>
+          </a:xfrm>
+          <a:prstGeom prst="rect">
+            <a:avLst/>
+          </a:prstGeom>
+          <a:solidFill>
+            <a:srgbClr val="27AE60"/>
           </a:solidFill>
           <a:ln>
             <a:solidFill>
@@ -10399,8 +10400,8 @@
         </p:nvSpPr>
         <p:spPr>
           <a:xfrm>
-            <a:off x="301752" y="1481328"/>
-            <a:ext cx="731520" cy="292608"/>
+            <a:off x="274320" y="1463040"/>
+            <a:ext cx="640080" cy="292608"/>
           </a:xfrm>
           <a:prstGeom prst="rect">
             <a:avLst/>
@@ -10434,8 +10435,8 @@
         </p:nvSpPr>
         <p:spPr>
           <a:xfrm>
-            <a:off x="2240280" y="1481328"/>
-            <a:ext cx="777240" cy="292608"/>
+            <a:off x="1783080" y="1463040"/>
+            <a:ext cx="640080" cy="292608"/>
           </a:xfrm>
           <a:prstGeom prst="rect">
             <a:avLst/>
@@ -10456,7 +10457,7 @@
                 </a:solidFill>
                 <a:latin typeface="Meiryo"/>
               </a:rPr>
-              <a:t>中</a:t>
+              <a:t>低</a:t>
             </a:r>
           </a:p>
         </p:txBody>
@@ -10469,8 +10470,8 @@
         </p:nvSpPr>
         <p:spPr>
           <a:xfrm>
-            <a:off x="320040" y="1892808"/>
-            <a:ext cx="2651760" cy="685800"/>
+            <a:off x="320040" y="1856232"/>
+            <a:ext cx="2057400" cy="685800"/>
           </a:xfrm>
           <a:prstGeom prst="rect">
             <a:avLst/>
@@ -10505,8 +10506,8 @@
         </p:nvSpPr>
         <p:spPr>
           <a:xfrm>
-            <a:off x="320040" y="2651760"/>
-            <a:ext cx="2651760" cy="1005840"/>
+            <a:off x="320040" y="2606040"/>
+            <a:ext cx="2057400" cy="1005840"/>
           </a:xfrm>
           <a:prstGeom prst="rect">
             <a:avLst/>
@@ -10527,8 +10528,8 @@
                 </a:solidFill>
                 <a:latin typeface="Meiryo"/>
               </a:rPr>
-              <a:t>片足でボックスを
-踏み切って跳ぶ</a:t>
+              <a:t>ボックス上の足で
+踏み切る（15〜46cm）</a:t>
             </a:r>
           </a:p>
         </p:txBody>
@@ -10541,8 +10542,8 @@
         </p:nvSpPr>
         <p:spPr>
           <a:xfrm>
-            <a:off x="3227832" y="1417320"/>
-            <a:ext cx="2834640" cy="2331720"/>
+            <a:off x="2624328" y="1417320"/>
+            <a:ext cx="2240280" cy="2331720"/>
           </a:xfrm>
           <a:prstGeom prst="rect">
             <a:avLst/>
@@ -10586,14 +10587,14 @@
         </p:nvSpPr>
         <p:spPr>
           <a:xfrm>
-            <a:off x="3227832" y="1417320"/>
-            <a:ext cx="2834640" cy="384048"/>
-          </a:xfrm>
-          <a:prstGeom prst="rect">
-            <a:avLst/>
-          </a:prstGeom>
-          <a:solidFill>
-            <a:srgbClr val="F39C12"/>
+            <a:off x="2624328" y="1417320"/>
+            <a:ext cx="2240280" cy="365760"/>
+          </a:xfrm>
+          <a:prstGeom prst="rect">
+            <a:avLst/>
+          </a:prstGeom>
+          <a:solidFill>
+            <a:srgbClr val="27AE60"/>
           </a:solidFill>
           <a:ln>
             <a:solidFill>
@@ -10631,8 +10632,8 @@
         </p:nvSpPr>
         <p:spPr>
           <a:xfrm>
-            <a:off x="3300984" y="1481328"/>
-            <a:ext cx="731520" cy="292608"/>
+            <a:off x="2670048" y="1463040"/>
+            <a:ext cx="640080" cy="292608"/>
           </a:xfrm>
           <a:prstGeom prst="rect">
             <a:avLst/>
@@ -10666,8 +10667,8 @@
         </p:nvSpPr>
         <p:spPr>
           <a:xfrm>
-            <a:off x="5239512" y="1481328"/>
-            <a:ext cx="777240" cy="292608"/>
+            <a:off x="4178808" y="1463040"/>
+            <a:ext cx="640080" cy="292608"/>
           </a:xfrm>
           <a:prstGeom prst="rect">
             <a:avLst/>
@@ -10688,7 +10689,7 @@
                 </a:solidFill>
                 <a:latin typeface="Meiryo"/>
               </a:rPr>
-              <a:t>中</a:t>
+              <a:t>低</a:t>
             </a:r>
           </a:p>
         </p:txBody>
@@ -10701,8 +10702,8 @@
         </p:nvSpPr>
         <p:spPr>
           <a:xfrm>
-            <a:off x="3319272" y="1892808"/>
-            <a:ext cx="2651760" cy="685800"/>
+            <a:off x="2715768" y="1856232"/>
+            <a:ext cx="2057400" cy="685800"/>
           </a:xfrm>
           <a:prstGeom prst="rect">
             <a:avLst/>
@@ -10737,8 +10738,8 @@
         </p:nvSpPr>
         <p:spPr>
           <a:xfrm>
-            <a:off x="3319272" y="2651760"/>
-            <a:ext cx="2651760" cy="1005840"/>
+            <a:off x="2715768" y="2606040"/>
+            <a:ext cx="2057400" cy="1005840"/>
           </a:xfrm>
           <a:prstGeom prst="rect">
             <a:avLst/>
@@ -10759,8 +10760,8 @@
                 </a:solidFill>
                 <a:latin typeface="Meiryo"/>
               </a:rPr>
-              <a:t>左右交互に
-ボックスを踏み切る</a:t>
+              <a:t>踏み切るたびに
+足を入れ替える</a:t>
             </a:r>
           </a:p>
         </p:txBody>
@@ -10773,8 +10774,8 @@
         </p:nvSpPr>
         <p:spPr>
           <a:xfrm>
-            <a:off x="6227064" y="1417320"/>
-            <a:ext cx="2834640" cy="2331720"/>
+            <a:off x="5020056" y="1417320"/>
+            <a:ext cx="2240280" cy="2331720"/>
           </a:xfrm>
           <a:prstGeom prst="rect">
             <a:avLst/>
@@ -10818,14 +10819,14 @@
         </p:nvSpPr>
         <p:spPr>
           <a:xfrm>
-            <a:off x="6227064" y="1417320"/>
-            <a:ext cx="2834640" cy="384048"/>
-          </a:xfrm>
-          <a:prstGeom prst="rect">
-            <a:avLst/>
-          </a:prstGeom>
-          <a:solidFill>
-            <a:srgbClr val="F39C12"/>
+            <a:off x="5020056" y="1417320"/>
+            <a:ext cx="2240280" cy="365760"/>
+          </a:xfrm>
+          <a:prstGeom prst="rect">
+            <a:avLst/>
+          </a:prstGeom>
+          <a:solidFill>
+            <a:srgbClr val="27AE60"/>
           </a:solidFill>
           <a:ln>
             <a:solidFill>
@@ -10863,8 +10864,8 @@
         </p:nvSpPr>
         <p:spPr>
           <a:xfrm>
-            <a:off x="6300216" y="1481328"/>
-            <a:ext cx="731520" cy="292608"/>
+            <a:off x="5065776" y="1463040"/>
+            <a:ext cx="640080" cy="292608"/>
           </a:xfrm>
           <a:prstGeom prst="rect">
             <a:avLst/>
@@ -10898,8 +10899,8 @@
         </p:nvSpPr>
         <p:spPr>
           <a:xfrm>
-            <a:off x="8238744" y="1481328"/>
-            <a:ext cx="777240" cy="292608"/>
+            <a:off x="6574536" y="1463040"/>
+            <a:ext cx="640080" cy="292608"/>
           </a:xfrm>
           <a:prstGeom prst="rect">
             <a:avLst/>
@@ -10920,7 +10921,7 @@
                 </a:solidFill>
                 <a:latin typeface="Meiryo"/>
               </a:rPr>
-              <a:t>中</a:t>
+              <a:t>低</a:t>
             </a:r>
           </a:p>
         </p:txBody>
@@ -10933,8 +10934,8 @@
         </p:nvSpPr>
         <p:spPr>
           <a:xfrm>
-            <a:off x="6318503" y="1892808"/>
-            <a:ext cx="2651760" cy="685800"/>
+            <a:off x="5111496" y="1856232"/>
+            <a:ext cx="2057400" cy="685800"/>
           </a:xfrm>
           <a:prstGeom prst="rect">
             <a:avLst/>
@@ -10969,8 +10970,8 @@
         </p:nvSpPr>
         <p:spPr>
           <a:xfrm>
-            <a:off x="6318503" y="2651760"/>
-            <a:ext cx="2651760" cy="1005840"/>
+            <a:off x="5111496" y="2606040"/>
+            <a:ext cx="2057400" cy="1005840"/>
           </a:xfrm>
           <a:prstGeom prst="rect">
             <a:avLst/>
@@ -10991,8 +10992,8 @@
                 </a:solidFill>
                 <a:latin typeface="Meiryo"/>
               </a:rPr>
-              <a:t>横からボックスを
-踏み切って跳ぶ</a:t>
+              <a:t>ボックスの横から
+踏み切る</a:t>
             </a:r>
           </a:p>
         </p:txBody>
@@ -11005,8 +11006,8 @@
         </p:nvSpPr>
         <p:spPr>
           <a:xfrm>
-            <a:off x="9226296" y="1417320"/>
-            <a:ext cx="2834640" cy="2331720"/>
+            <a:off x="7415783" y="1417320"/>
+            <a:ext cx="2240280" cy="2331720"/>
           </a:xfrm>
           <a:prstGeom prst="rect">
             <a:avLst/>
@@ -11050,8 +11051,8 @@
         </p:nvSpPr>
         <p:spPr>
           <a:xfrm>
-            <a:off x="9226296" y="1417320"/>
-            <a:ext cx="2834640" cy="384048"/>
+            <a:off x="7415783" y="1417320"/>
+            <a:ext cx="2240280" cy="365760"/>
           </a:xfrm>
           <a:prstGeom prst="rect">
             <a:avLst/>
@@ -11095,8 +11096,8 @@
         </p:nvSpPr>
         <p:spPr>
           <a:xfrm>
-            <a:off x="9299448" y="1481328"/>
-            <a:ext cx="731520" cy="292608"/>
+            <a:off x="7461504" y="1463040"/>
+            <a:ext cx="640080" cy="292608"/>
           </a:xfrm>
           <a:prstGeom prst="rect">
             <a:avLst/>
@@ -11130,8 +11131,8 @@
         </p:nvSpPr>
         <p:spPr>
           <a:xfrm>
-            <a:off x="11237976" y="1481328"/>
-            <a:ext cx="777240" cy="292608"/>
+            <a:off x="8970263" y="1463040"/>
+            <a:ext cx="640080" cy="292608"/>
           </a:xfrm>
           <a:prstGeom prst="rect">
             <a:avLst/>
@@ -11165,8 +11166,8 @@
         </p:nvSpPr>
         <p:spPr>
           <a:xfrm>
-            <a:off x="9317736" y="1892808"/>
-            <a:ext cx="2651760" cy="685800"/>
+            <a:off x="7507223" y="1856232"/>
+            <a:ext cx="2057400" cy="685800"/>
           </a:xfrm>
           <a:prstGeom prst="rect">
             <a:avLst/>
@@ -11201,8 +11202,8 @@
         </p:nvSpPr>
         <p:spPr>
           <a:xfrm>
-            <a:off x="9317736" y="2651760"/>
-            <a:ext cx="2651760" cy="1005840"/>
+            <a:off x="7507223" y="2606040"/>
+            <a:ext cx="2057400" cy="1005840"/>
           </a:xfrm>
           <a:prstGeom prst="rect">
             <a:avLst/>
@@ -11223,8 +11224,8 @@
                 </a:solidFill>
                 <a:latin typeface="Meiryo"/>
               </a:rPr>
-              <a:t>左右交互に
-ボックスを乗り越える</a:t>
+              <a:t>ボックスを横に
+跳び越える</a:t>
             </a:r>
           </a:p>
         </p:txBody>
@@ -11237,8 +11238,8 @@
         </p:nvSpPr>
         <p:spPr>
           <a:xfrm>
-            <a:off x="228600" y="3886200"/>
-            <a:ext cx="2834640" cy="2331720"/>
+            <a:off x="9811512" y="1417320"/>
+            <a:ext cx="2240280" cy="2331720"/>
           </a:xfrm>
           <a:prstGeom prst="rect">
             <a:avLst/>
@@ -11282,14 +11283,14 @@
         </p:nvSpPr>
         <p:spPr>
           <a:xfrm>
-            <a:off x="228600" y="3886200"/>
-            <a:ext cx="2834640" cy="384048"/>
-          </a:xfrm>
-          <a:prstGeom prst="rect">
-            <a:avLst/>
-          </a:prstGeom>
-          <a:solidFill>
-            <a:srgbClr val="F39C12"/>
+            <a:off x="9811512" y="1417320"/>
+            <a:ext cx="2240280" cy="365760"/>
+          </a:xfrm>
+          <a:prstGeom prst="rect">
+            <a:avLst/>
+          </a:prstGeom>
+          <a:solidFill>
+            <a:srgbClr val="27AE60"/>
           </a:solidFill>
           <a:ln>
             <a:solidFill>
@@ -11327,8 +11328,8 @@
         </p:nvSpPr>
         <p:spPr>
           <a:xfrm>
-            <a:off x="301752" y="3950208"/>
-            <a:ext cx="731520" cy="292608"/>
+            <a:off x="9857232" y="1463040"/>
+            <a:ext cx="640080" cy="292608"/>
           </a:xfrm>
           <a:prstGeom prst="rect">
             <a:avLst/>
@@ -11362,8 +11363,8 @@
         </p:nvSpPr>
         <p:spPr>
           <a:xfrm>
-            <a:off x="2240280" y="3950208"/>
-            <a:ext cx="777240" cy="292608"/>
+            <a:off x="11365992" y="1463040"/>
+            <a:ext cx="640080" cy="292608"/>
           </a:xfrm>
           <a:prstGeom prst="rect">
             <a:avLst/>
@@ -11384,7 +11385,7 @@
                 </a:solidFill>
                 <a:latin typeface="Meiryo"/>
               </a:rPr>
-              <a:t>中</a:t>
+              <a:t>低</a:t>
             </a:r>
           </a:p>
         </p:txBody>
@@ -11397,8 +11398,8 @@
         </p:nvSpPr>
         <p:spPr>
           <a:xfrm>
-            <a:off x="320040" y="4361688"/>
-            <a:ext cx="2651760" cy="685800"/>
+            <a:off x="9902952" y="1856232"/>
+            <a:ext cx="2057400" cy="685800"/>
           </a:xfrm>
           <a:prstGeom prst="rect">
             <a:avLst/>
@@ -11433,8 +11434,8 @@
         </p:nvSpPr>
         <p:spPr>
           <a:xfrm>
-            <a:off x="320040" y="5120640"/>
-            <a:ext cx="2651760" cy="1005840"/>
+            <a:off x="9902952" y="2606040"/>
+            <a:ext cx="2057400" cy="1005840"/>
           </a:xfrm>
           <a:prstGeom prst="rect">
             <a:avLst/>
@@ -11455,8 +11456,8 @@
                 </a:solidFill>
                 <a:latin typeface="Meiryo"/>
               </a:rPr>
-              <a:t>両足でボックスの
-上に跳び乗る</a:t>
+              <a:t>両脚で跳び乗り
+ハーフスクワット着地</a:t>
             </a:r>
           </a:p>
         </p:txBody>
@@ -11469,8 +11470,8 @@
         </p:nvSpPr>
         <p:spPr>
           <a:xfrm>
-            <a:off x="3227832" y="3886200"/>
-            <a:ext cx="2834640" cy="2331720"/>
+            <a:off x="228600" y="3931920"/>
+            <a:ext cx="2240280" cy="2331720"/>
           </a:xfrm>
           <a:prstGeom prst="rect">
             <a:avLst/>
@@ -11514,8 +11515,8 @@
         </p:nvSpPr>
         <p:spPr>
           <a:xfrm>
-            <a:off x="3227832" y="3886200"/>
-            <a:ext cx="2834640" cy="384048"/>
+            <a:off x="228600" y="3931920"/>
+            <a:ext cx="2240280" cy="365760"/>
           </a:xfrm>
           <a:prstGeom prst="rect">
             <a:avLst/>
@@ -11559,8 +11560,8 @@
         </p:nvSpPr>
         <p:spPr>
           <a:xfrm>
-            <a:off x="3300984" y="3950208"/>
-            <a:ext cx="731520" cy="292608"/>
+            <a:off x="274320" y="3977639"/>
+            <a:ext cx="640080" cy="292608"/>
           </a:xfrm>
           <a:prstGeom prst="rect">
             <a:avLst/>
@@ -11594,8 +11595,8 @@
         </p:nvSpPr>
         <p:spPr>
           <a:xfrm>
-            <a:off x="5239512" y="3950208"/>
-            <a:ext cx="777240" cy="292608"/>
+            <a:off x="1783080" y="3977639"/>
+            <a:ext cx="640080" cy="292608"/>
           </a:xfrm>
           <a:prstGeom prst="rect">
             <a:avLst/>
@@ -11629,8 +11630,8 @@
         </p:nvSpPr>
         <p:spPr>
           <a:xfrm>
-            <a:off x="3319272" y="4361688"/>
-            <a:ext cx="2651760" cy="685800"/>
+            <a:off x="320040" y="4370831"/>
+            <a:ext cx="2057400" cy="685800"/>
           </a:xfrm>
           <a:prstGeom prst="rect">
             <a:avLst/>
@@ -11665,8 +11666,8 @@
         </p:nvSpPr>
         <p:spPr>
           <a:xfrm>
-            <a:off x="3319272" y="5120640"/>
-            <a:ext cx="2651760" cy="1005840"/>
+            <a:off x="320040" y="5120640"/>
+            <a:ext cx="2057400" cy="1005840"/>
           </a:xfrm>
           <a:prstGeom prst="rect">
             <a:avLst/>
@@ -11687,8 +11688,8 @@
                 </a:solidFill>
                 <a:latin typeface="Meiryo"/>
               </a:rPr>
-              <a:t>片脚でボックスの
-上に跳び乗る</a:t>
+              <a:t>片脚で跳び乗り
+片脚で着地</a:t>
             </a:r>
           </a:p>
         </p:txBody>
@@ -11701,8 +11702,8 @@
         </p:nvSpPr>
         <p:spPr>
           <a:xfrm>
-            <a:off x="6227064" y="3886200"/>
-            <a:ext cx="2834640" cy="2331720"/>
+            <a:off x="2624328" y="3931920"/>
+            <a:ext cx="2240280" cy="2331720"/>
           </a:xfrm>
           <a:prstGeom prst="rect">
             <a:avLst/>
@@ -11746,8 +11747,8 @@
         </p:nvSpPr>
         <p:spPr>
           <a:xfrm>
-            <a:off x="6227064" y="3886200"/>
-            <a:ext cx="2834640" cy="384048"/>
+            <a:off x="2624328" y="3931920"/>
+            <a:ext cx="2240280" cy="365760"/>
           </a:xfrm>
           <a:prstGeom prst="rect">
             <a:avLst/>
@@ -11791,8 +11792,8 @@
         </p:nvSpPr>
         <p:spPr>
           <a:xfrm>
-            <a:off x="6300216" y="3950208"/>
-            <a:ext cx="731520" cy="292608"/>
+            <a:off x="2670048" y="3977639"/>
+            <a:ext cx="640080" cy="292608"/>
           </a:xfrm>
           <a:prstGeom prst="rect">
             <a:avLst/>
@@ -11826,8 +11827,8 @@
         </p:nvSpPr>
         <p:spPr>
           <a:xfrm>
-            <a:off x="8238744" y="3950208"/>
-            <a:ext cx="777240" cy="292608"/>
+            <a:off x="4178808" y="3977639"/>
+            <a:ext cx="640080" cy="292608"/>
           </a:xfrm>
           <a:prstGeom prst="rect">
             <a:avLst/>
@@ -11861,8 +11862,8 @@
         </p:nvSpPr>
         <p:spPr>
           <a:xfrm>
-            <a:off x="6318503" y="4361688"/>
-            <a:ext cx="2651760" cy="685800"/>
+            <a:off x="2715768" y="4370831"/>
+            <a:ext cx="2057400" cy="685800"/>
           </a:xfrm>
           <a:prstGeom prst="rect">
             <a:avLst/>
@@ -11897,8 +11898,8 @@
         </p:nvSpPr>
         <p:spPr>
           <a:xfrm>
-            <a:off x="6318503" y="5120640"/>
-            <a:ext cx="2651760" cy="1005840"/>
+            <a:off x="2715768" y="5120640"/>
+            <a:ext cx="2057400" cy="1005840"/>
           </a:xfrm>
           <a:prstGeom prst="rect">
             <a:avLst/>
@@ -11919,8 +11920,8 @@
                 </a:solidFill>
                 <a:latin typeface="Meiryo"/>
               </a:rPr>
-              <a:t>スクワットから
-ボックス上へ</a:t>
+              <a:t>手を頭の後ろで組み
+跳び乗る</a:t>
             </a:r>
           </a:p>
         </p:txBody>
@@ -11933,8 +11934,8 @@
         </p:nvSpPr>
         <p:spPr>
           <a:xfrm>
-            <a:off x="9226296" y="3886200"/>
-            <a:ext cx="2834640" cy="2331720"/>
+            <a:off x="5020056" y="3931920"/>
+            <a:ext cx="2240280" cy="2331720"/>
           </a:xfrm>
           <a:prstGeom prst="rect">
             <a:avLst/>
@@ -11978,8 +11979,8 @@
         </p:nvSpPr>
         <p:spPr>
           <a:xfrm>
-            <a:off x="9226296" y="3886200"/>
-            <a:ext cx="2834640" cy="384048"/>
+            <a:off x="5020056" y="3931920"/>
+            <a:ext cx="2240280" cy="365760"/>
           </a:xfrm>
           <a:prstGeom prst="rect">
             <a:avLst/>
@@ -12023,8 +12024,8 @@
         </p:nvSpPr>
         <p:spPr>
           <a:xfrm>
-            <a:off x="9299448" y="3950208"/>
-            <a:ext cx="731520" cy="292608"/>
+            <a:off x="5065776" y="3977639"/>
+            <a:ext cx="640080" cy="292608"/>
           </a:xfrm>
           <a:prstGeom prst="rect">
             <a:avLst/>
@@ -12058,8 +12059,8 @@
         </p:nvSpPr>
         <p:spPr>
           <a:xfrm>
-            <a:off x="11237976" y="3950208"/>
-            <a:ext cx="777240" cy="292608"/>
+            <a:off x="6574536" y="3977639"/>
+            <a:ext cx="640080" cy="292608"/>
           </a:xfrm>
           <a:prstGeom prst="rect">
             <a:avLst/>
@@ -12093,8 +12094,8 @@
         </p:nvSpPr>
         <p:spPr>
           <a:xfrm>
-            <a:off x="9317736" y="4361688"/>
-            <a:ext cx="2651760" cy="685800"/>
+            <a:off x="5111496" y="4370831"/>
+            <a:ext cx="2057400" cy="685800"/>
           </a:xfrm>
           <a:prstGeom prst="rect">
             <a:avLst/>
@@ -12129,8 +12130,8 @@
         </p:nvSpPr>
         <p:spPr>
           <a:xfrm>
-            <a:off x="9317736" y="5120640"/>
-            <a:ext cx="2651760" cy="1005840"/>
+            <a:off x="5111496" y="5120640"/>
+            <a:ext cx="2057400" cy="1005840"/>
           </a:xfrm>
           <a:prstGeom prst="rect">
             <a:avLst/>
@@ -12151,8 +12152,240 @@
                 </a:solidFill>
                 <a:latin typeface="Meiryo"/>
               </a:rPr>
-              <a:t>横方向に
-ボックスの上へ</a:t>
+              <a:t>ボックスの横から
+跳び乗る</a:t>
+            </a:r>
+          </a:p>
+        </p:txBody>
+      </p:sp>
+      <p:sp>
+        <p:nvSpPr>
+          <p:cNvPr id="55" name="Rectangle 54"/>
+          <p:cNvSpPr/>
+          <p:nvPr/>
+        </p:nvSpPr>
+        <p:spPr>
+          <a:xfrm>
+            <a:off x="7415783" y="3931920"/>
+            <a:ext cx="2240280" cy="2331720"/>
+          </a:xfrm>
+          <a:prstGeom prst="rect">
+            <a:avLst/>
+          </a:prstGeom>
+          <a:solidFill>
+            <a:srgbClr val="FFFFFF"/>
+          </a:solidFill>
+          <a:ln>
+            <a:solidFill>
+              <a:srgbClr val="FFFFFF"/>
+            </a:solidFill>
+          </a:ln>
+        </p:spPr>
+        <p:style>
+          <a:lnRef idx="1">
+            <a:schemeClr val="accent1"/>
+          </a:lnRef>
+          <a:fillRef idx="3">
+            <a:schemeClr val="accent1"/>
+          </a:fillRef>
+          <a:effectRef idx="2">
+            <a:schemeClr val="accent1"/>
+          </a:effectRef>
+          <a:fontRef idx="minor">
+            <a:schemeClr val="lt1"/>
+          </a:fontRef>
+        </p:style>
+        <p:txBody>
+          <a:bodyPr rtlCol="0" anchor="ctr"/>
+          <a:lstStyle/>
+          <a:p>
+            <a:pPr algn="ctr"/>
+          </a:p>
+        </p:txBody>
+      </p:sp>
+      <p:sp>
+        <p:nvSpPr>
+          <p:cNvPr id="56" name="Rectangle 55"/>
+          <p:cNvSpPr/>
+          <p:nvPr/>
+        </p:nvSpPr>
+        <p:spPr>
+          <a:xfrm>
+            <a:off x="7415783" y="3931920"/>
+            <a:ext cx="2240280" cy="365760"/>
+          </a:xfrm>
+          <a:prstGeom prst="rect">
+            <a:avLst/>
+          </a:prstGeom>
+          <a:solidFill>
+            <a:srgbClr val="F39C12"/>
+          </a:solidFill>
+          <a:ln>
+            <a:solidFill>
+              <a:srgbClr val="FFFFFF"/>
+            </a:solidFill>
+          </a:ln>
+        </p:spPr>
+        <p:style>
+          <a:lnRef idx="1">
+            <a:schemeClr val="accent1"/>
+          </a:lnRef>
+          <a:fillRef idx="3">
+            <a:schemeClr val="accent1"/>
+          </a:fillRef>
+          <a:effectRef idx="2">
+            <a:schemeClr val="accent1"/>
+          </a:effectRef>
+          <a:fontRef idx="minor">
+            <a:schemeClr val="lt1"/>
+          </a:fontRef>
+        </p:style>
+        <p:txBody>
+          <a:bodyPr rtlCol="0" anchor="ctr"/>
+          <a:lstStyle/>
+          <a:p>
+            <a:pPr algn="ctr"/>
+          </a:p>
+        </p:txBody>
+      </p:sp>
+      <p:sp>
+        <p:nvSpPr>
+          <p:cNvPr id="57" name="TextBox 56"/>
+          <p:cNvSpPr txBox="1"/>
+          <p:nvPr/>
+        </p:nvSpPr>
+        <p:spPr>
+          <a:xfrm>
+            <a:off x="7461504" y="3977639"/>
+            <a:ext cx="640080" cy="292608"/>
+          </a:xfrm>
+          <a:prstGeom prst="rect">
+            <a:avLst/>
+          </a:prstGeom>
+          <a:noFill/>
+        </p:spPr>
+        <p:txBody>
+          <a:bodyPr wrap="square">
+            <a:spAutoFit/>
+          </a:bodyPr>
+          <a:lstStyle/>
+          <a:p>
+            <a:pPr algn="l"/>
+            <a:r>
+              <a:rPr sz="1000" b="1">
+                <a:solidFill>
+                  <a:srgbClr val="FFFFFF"/>
+                </a:solidFill>
+                <a:latin typeface="Meiryo"/>
+              </a:rPr>
+              <a:t>18.34</a:t>
+            </a:r>
+          </a:p>
+        </p:txBody>
+      </p:sp>
+      <p:sp>
+        <p:nvSpPr>
+          <p:cNvPr id="58" name="TextBox 57"/>
+          <p:cNvSpPr txBox="1"/>
+          <p:nvPr/>
+        </p:nvSpPr>
+        <p:spPr>
+          <a:xfrm>
+            <a:off x="8970263" y="3977639"/>
+            <a:ext cx="640080" cy="292608"/>
+          </a:xfrm>
+          <a:prstGeom prst="rect">
+            <a:avLst/>
+          </a:prstGeom>
+          <a:noFill/>
+        </p:spPr>
+        <p:txBody>
+          <a:bodyPr wrap="square">
+            <a:spAutoFit/>
+          </a:bodyPr>
+          <a:lstStyle/>
+          <a:p>
+            <a:pPr algn="r"/>
+            <a:r>
+              <a:rPr sz="1000" b="1">
+                <a:solidFill>
+                  <a:srgbClr val="FFFFFF"/>
+                </a:solidFill>
+                <a:latin typeface="Meiryo"/>
+              </a:rPr>
+              <a:t>中</a:t>
+            </a:r>
+          </a:p>
+        </p:txBody>
+      </p:sp>
+      <p:sp>
+        <p:nvSpPr>
+          <p:cNvPr id="59" name="TextBox 58"/>
+          <p:cNvSpPr txBox="1"/>
+          <p:nvPr/>
+        </p:nvSpPr>
+        <p:spPr>
+          <a:xfrm>
+            <a:off x="7507223" y="4370831"/>
+            <a:ext cx="2057400" cy="685800"/>
+          </a:xfrm>
+          <a:prstGeom prst="rect">
+            <a:avLst/>
+          </a:prstGeom>
+          <a:noFill/>
+        </p:spPr>
+        <p:txBody>
+          <a:bodyPr wrap="square">
+            <a:spAutoFit/>
+          </a:bodyPr>
+          <a:lstStyle/>
+          <a:p>
+            <a:pPr algn="ctr"/>
+            <a:r>
+              <a:rPr sz="1200" b="1">
+                <a:solidFill>
+                  <a:srgbClr val="1A3A5C"/>
+                </a:solidFill>
+                <a:latin typeface="Meiryo"/>
+              </a:rPr>
+              <a:t>ドロップ
+フリーズ</a:t>
+            </a:r>
+          </a:p>
+        </p:txBody>
+      </p:sp>
+      <p:sp>
+        <p:nvSpPr>
+          <p:cNvPr id="60" name="TextBox 59"/>
+          <p:cNvSpPr txBox="1"/>
+          <p:nvPr/>
+        </p:nvSpPr>
+        <p:spPr>
+          <a:xfrm>
+            <a:off x="7507223" y="5120640"/>
+            <a:ext cx="2057400" cy="1005840"/>
+          </a:xfrm>
+          <a:prstGeom prst="rect">
+            <a:avLst/>
+          </a:prstGeom>
+          <a:noFill/>
+        </p:spPr>
+        <p:txBody>
+          <a:bodyPr wrap="square">
+            <a:spAutoFit/>
+          </a:bodyPr>
+          <a:lstStyle/>
+          <a:p>
+            <a:pPr algn="ctr"/>
+            <a:r>
+              <a:rPr sz="1100" b="0">
+                <a:solidFill>
+                  <a:srgbClr val="7F8C8D"/>
+                </a:solidFill>
+                <a:latin typeface="Meiryo"/>
+              </a:rPr>
+              <a:t>踏み出して着地し
+衝撃を吸収して止まる</a:t>
             </a:r>
           </a:p>
         </p:txBody>
@@ -12375,7 +12608,7 @@
                 </a:solidFill>
                 <a:latin typeface="Meiryo"/>
               </a:rPr>
-              <a:t>Depth Jumps  |  強度：高  ★最高強度</a:t>
+              <a:t>Depth Jumps  |  強度：高</a:t>
             </a:r>
           </a:p>
         </p:txBody>
@@ -12449,13 +12682,13 @@
           <a:p>
             <a:pPr algn="l"/>
             <a:r>
-              <a:rPr sz="1300" b="1">
+              <a:rPr sz="1200" b="1">
                 <a:solidFill>
                   <a:srgbClr val="E74C3C"/>
                 </a:solidFill>
                 <a:latin typeface="Meiryo"/>
               </a:rPr>
-              <a:t>注意：デプスジャンプは最高強度のドリルです。必ず段階的な評価・指導のもとで実施してください。</a:t>
+              <a:t>共通：真っ直ぐ踏み出す（跳び上がらない）／接地時間は最小限／最初は30cmから。高さは41〜107cm（一般的に76〜81cm）</a:t>
             </a:r>
           </a:p>
         </p:txBody>
@@ -12580,7 +12813,7 @@
                 </a:solidFill>
                 <a:latin typeface="Meiryo"/>
               </a:rPr>
-              <a:t>18.34</a:t>
+              <a:t>18.35</a:t>
             </a:r>
           </a:p>
         </p:txBody>
@@ -12615,8 +12848,7 @@
                 </a:solidFill>
                 <a:latin typeface="Meiryo"/>
               </a:rPr>
-              <a:t>ドロップ
-フリーズ</a:t>
+              <a:t>デプスジャンプ</a:t>
             </a:r>
           </a:p>
         </p:txBody>
@@ -12651,8 +12883,8 @@
                 </a:solidFill>
                 <a:latin typeface="Meiryo"/>
               </a:rPr>
-              <a:t>降りて着地で静止
-フォームの確認用</a:t>
+              <a:t>着地したらただちに
+できるだけ高く跳ぶ</a:t>
             </a:r>
           </a:p>
         </p:txBody>
@@ -12777,7 +13009,7 @@
                 </a:solidFill>
                 <a:latin typeface="Meiryo"/>
               </a:rPr>
-              <a:t>18.35</a:t>
+              <a:t>18.36</a:t>
             </a:r>
           </a:p>
         </p:txBody>
@@ -12812,7 +13044,8 @@
                 </a:solidFill>
                 <a:latin typeface="Meiryo"/>
               </a:rPr>
-              <a:t>デプスジャンプ</a:t>
+              <a:t>デプスジャンプ
+to セカンドボックス</a:t>
             </a:r>
           </a:p>
         </p:txBody>
@@ -12847,8 +13080,8 @@
                 </a:solidFill>
                 <a:latin typeface="Meiryo"/>
               </a:rPr>
-              <a:t>ボックスから降りて
-即座に最大高さへ</a:t>
+              <a:t>着地後ただちに2つ目の
+ボックスへ（間隔61cm〜）</a:t>
             </a:r>
           </a:p>
         </p:txBody>
@@ -12973,7 +13206,7 @@
                 </a:solidFill>
                 <a:latin typeface="Meiryo"/>
               </a:rPr>
-              <a:t>18.36</a:t>
+              <a:t>18.37</a:t>
             </a:r>
           </a:p>
         </p:txBody>
@@ -13008,8 +13241,8 @@
                 </a:solidFill>
                 <a:latin typeface="Meiryo"/>
               </a:rPr>
-              <a:t>デプスジャンプ
-to セカンドボックス</a:t>
+              <a:t>スクワット
+デプスジャンプ</a:t>
             </a:r>
           </a:p>
         </p:txBody>
@@ -13044,8 +13277,8 @@
                 </a:solidFill>
                 <a:latin typeface="Meiryo"/>
               </a:rPr>
-              <a:t>着地後に
-第2ボックスへ跳ぶ</a:t>
+              <a:t>股・膝約90°で着地し
+ただちに跳ぶ</a:t>
             </a:r>
           </a:p>
         </p:txBody>
@@ -13170,7 +13403,7 @@
                 </a:solidFill>
                 <a:latin typeface="Meiryo"/>
               </a:rPr>
-              <a:t>18.37</a:t>
+              <a:t>18.38</a:t>
             </a:r>
           </a:p>
         </p:txBody>
@@ -13205,7 +13438,7 @@
                 </a:solidFill>
                 <a:latin typeface="Meiryo"/>
               </a:rPr>
-              <a:t>スクワット
+              <a:t>側方動作を伴う
 デプスジャンプ</a:t>
             </a:r>
           </a:p>
@@ -13241,8 +13474,8 @@
                 </a:solidFill>
                 <a:latin typeface="Meiryo"/>
               </a:rPr>
-              <a:t>着地後スクワット
-して最大高さへ</a:t>
+              <a:t>パートナーが示した
+方向へただちにダッシュ</a:t>
             </a:r>
           </a:p>
         </p:txBody>
@@ -13255,7 +13488,7 @@
         </p:nvSpPr>
         <p:spPr>
           <a:xfrm>
-            <a:off x="228600" y="4572000"/>
+            <a:off x="1728216" y="4572000"/>
             <a:ext cx="2834640" cy="2011680"/>
           </a:xfrm>
           <a:prstGeom prst="rect">
@@ -13300,7 +13533,7 @@
         </p:nvSpPr>
         <p:spPr>
           <a:xfrm>
-            <a:off x="228600" y="4572000"/>
+            <a:off x="1728216" y="4572000"/>
             <a:ext cx="2834640" cy="365760"/>
           </a:xfrm>
           <a:prstGeom prst="rect">
@@ -13345,7 +13578,7 @@
         </p:nvSpPr>
         <p:spPr>
           <a:xfrm>
-            <a:off x="301752" y="4626864"/>
+            <a:off x="1801368" y="4626864"/>
             <a:ext cx="731520" cy="292608"/>
           </a:xfrm>
           <a:prstGeom prst="rect">
@@ -13367,7 +13600,7 @@
                 </a:solidFill>
                 <a:latin typeface="Meiryo"/>
               </a:rPr>
-              <a:t>18.38</a:t>
+              <a:t>18.39</a:t>
             </a:r>
           </a:p>
         </p:txBody>
@@ -13380,7 +13613,7 @@
         </p:nvSpPr>
         <p:spPr>
           <a:xfrm>
-            <a:off x="320040" y="5029200"/>
+            <a:off x="1819656" y="5029200"/>
             <a:ext cx="2651760" cy="685800"/>
           </a:xfrm>
           <a:prstGeom prst="rect">
@@ -13402,7 +13635,7 @@
                 </a:solidFill>
                 <a:latin typeface="Meiryo"/>
               </a:rPr>
-              <a:t>側方動作を伴う
+              <a:t>立ち幅跳びを伴う
 デプスジャンプ</a:t>
             </a:r>
           </a:p>
@@ -13416,7 +13649,7 @@
         </p:nvSpPr>
         <p:spPr>
           <a:xfrm>
-            <a:off x="320040" y="5760720"/>
+            <a:off x="1819656" y="5760720"/>
             <a:ext cx="2651760" cy="777240"/>
           </a:xfrm>
           <a:prstGeom prst="rect">
@@ -13438,8 +13671,8 @@
                 </a:solidFill>
                 <a:latin typeface="Meiryo"/>
               </a:rPr>
-              <a:t>パートナーの合図で
-方向を変えて跳ぶ</a:t>
+              <a:t>着地後ただちに
+前方へ遠く跳ぶ</a:t>
             </a:r>
           </a:p>
         </p:txBody>
@@ -13452,7 +13685,7 @@
         </p:nvSpPr>
         <p:spPr>
           <a:xfrm>
-            <a:off x="3227832" y="4572000"/>
+            <a:off x="4727448" y="4572000"/>
             <a:ext cx="2834640" cy="2011680"/>
           </a:xfrm>
           <a:prstGeom prst="rect">
@@ -13497,7 +13730,7 @@
         </p:nvSpPr>
         <p:spPr>
           <a:xfrm>
-            <a:off x="3227832" y="4572000"/>
+            <a:off x="4727448" y="4572000"/>
             <a:ext cx="2834640" cy="365760"/>
           </a:xfrm>
           <a:prstGeom prst="rect">
@@ -13542,7 +13775,7 @@
         </p:nvSpPr>
         <p:spPr>
           <a:xfrm>
-            <a:off x="3300984" y="4626864"/>
+            <a:off x="4800600" y="4626864"/>
             <a:ext cx="731520" cy="292608"/>
           </a:xfrm>
           <a:prstGeom prst="rect">
@@ -13564,7 +13797,7 @@
                 </a:solidFill>
                 <a:latin typeface="Meiryo"/>
               </a:rPr>
-              <a:t>18.39</a:t>
+              <a:t>18.40</a:t>
             </a:r>
           </a:p>
         </p:txBody>
@@ -13577,7 +13810,7 @@
         </p:nvSpPr>
         <p:spPr>
           <a:xfrm>
-            <a:off x="3319272" y="5029200"/>
+            <a:off x="4818888" y="5029200"/>
             <a:ext cx="2651760" cy="685800"/>
           </a:xfrm>
           <a:prstGeom prst="rect">
@@ -13599,8 +13832,8 @@
                 </a:solidFill>
                 <a:latin typeface="Meiryo"/>
               </a:rPr>
-              <a:t>立ち幅跳びを伴う
-デプスジャンプ</a:t>
+              <a:t>デプスジャンプ
+180°ターン</a:t>
             </a:r>
           </a:p>
         </p:txBody>
@@ -13613,7 +13846,7 @@
         </p:nvSpPr>
         <p:spPr>
           <a:xfrm>
-            <a:off x="3319272" y="5760720"/>
+            <a:off x="4818888" y="5760720"/>
             <a:ext cx="2651760" cy="777240"/>
           </a:xfrm>
           <a:prstGeom prst="rect">
@@ -13635,8 +13868,8 @@
                 </a:solidFill>
                 <a:latin typeface="Meiryo"/>
               </a:rPr>
-              <a:t>降りた後に最大距離
-で前方ジャンプ</a:t>
+              <a:t>空中で180°回転し
+反対向きに着地</a:t>
             </a:r>
           </a:p>
         </p:txBody>
@@ -13649,7 +13882,7 @@
         </p:nvSpPr>
         <p:spPr>
           <a:xfrm>
-            <a:off x="6227064" y="4572000"/>
+            <a:off x="7726679" y="4572000"/>
             <a:ext cx="2834640" cy="2011680"/>
           </a:xfrm>
           <a:prstGeom prst="rect">
@@ -13694,7 +13927,7 @@
         </p:nvSpPr>
         <p:spPr>
           <a:xfrm>
-            <a:off x="6227064" y="4572000"/>
+            <a:off x="7726679" y="4572000"/>
             <a:ext cx="2834640" cy="365760"/>
           </a:xfrm>
           <a:prstGeom prst="rect">
@@ -13739,7 +13972,7 @@
         </p:nvSpPr>
         <p:spPr>
           <a:xfrm>
-            <a:off x="6300216" y="4626864"/>
+            <a:off x="7799831" y="4626864"/>
             <a:ext cx="731520" cy="292608"/>
           </a:xfrm>
           <a:prstGeom prst="rect">
@@ -13761,7 +13994,7 @@
                 </a:solidFill>
                 <a:latin typeface="Meiryo"/>
               </a:rPr>
-              <a:t>18.40</a:t>
+              <a:t>18.41</a:t>
             </a:r>
           </a:p>
         </p:txBody>
@@ -13774,204 +14007,7 @@
         </p:nvSpPr>
         <p:spPr>
           <a:xfrm>
-            <a:off x="6318503" y="5029200"/>
-            <a:ext cx="2651760" cy="685800"/>
-          </a:xfrm>
-          <a:prstGeom prst="rect">
-            <a:avLst/>
-          </a:prstGeom>
-          <a:noFill/>
-        </p:spPr>
-        <p:txBody>
-          <a:bodyPr wrap="square">
-            <a:spAutoFit/>
-          </a:bodyPr>
-          <a:lstStyle/>
-          <a:p>
-            <a:pPr algn="ctr"/>
-            <a:r>
-              <a:rPr sz="1200" b="1">
-                <a:solidFill>
-                  <a:srgbClr val="1A3A5C"/>
-                </a:solidFill>
-                <a:latin typeface="Meiryo"/>
-              </a:rPr>
-              <a:t>デプスジャンプ
-180°ターン</a:t>
-            </a:r>
-          </a:p>
-        </p:txBody>
-      </p:sp>
-      <p:sp>
-        <p:nvSpPr>
-          <p:cNvPr id="43" name="TextBox 42"/>
-          <p:cNvSpPr txBox="1"/>
-          <p:nvPr/>
-        </p:nvSpPr>
-        <p:spPr>
-          <a:xfrm>
-            <a:off x="6318503" y="5760720"/>
-            <a:ext cx="2651760" cy="777240"/>
-          </a:xfrm>
-          <a:prstGeom prst="rect">
-            <a:avLst/>
-          </a:prstGeom>
-          <a:noFill/>
-        </p:spPr>
-        <p:txBody>
-          <a:bodyPr wrap="square">
-            <a:spAutoFit/>
-          </a:bodyPr>
-          <a:lstStyle/>
-          <a:p>
-            <a:pPr algn="ctr"/>
-            <a:r>
-              <a:rPr sz="1100" b="0">
-                <a:solidFill>
-                  <a:srgbClr val="7F8C8D"/>
-                </a:solidFill>
-                <a:latin typeface="Meiryo"/>
-              </a:rPr>
-              <a:t>空中で180°回転
-高い協調性が必要</a:t>
-            </a:r>
-          </a:p>
-        </p:txBody>
-      </p:sp>
-      <p:sp>
-        <p:nvSpPr>
-          <p:cNvPr id="44" name="Rectangle 43"/>
-          <p:cNvSpPr/>
-          <p:nvPr/>
-        </p:nvSpPr>
-        <p:spPr>
-          <a:xfrm>
-            <a:off x="9226296" y="4572000"/>
-            <a:ext cx="2834640" cy="2011680"/>
-          </a:xfrm>
-          <a:prstGeom prst="rect">
-            <a:avLst/>
-          </a:prstGeom>
-          <a:solidFill>
-            <a:srgbClr val="FFFFFF"/>
-          </a:solidFill>
-          <a:ln>
-            <a:solidFill>
-              <a:srgbClr val="FFFFFF"/>
-            </a:solidFill>
-          </a:ln>
-        </p:spPr>
-        <p:style>
-          <a:lnRef idx="1">
-            <a:schemeClr val="accent1"/>
-          </a:lnRef>
-          <a:fillRef idx="3">
-            <a:schemeClr val="accent1"/>
-          </a:fillRef>
-          <a:effectRef idx="2">
-            <a:schemeClr val="accent1"/>
-          </a:effectRef>
-          <a:fontRef idx="minor">
-            <a:schemeClr val="lt1"/>
-          </a:fontRef>
-        </p:style>
-        <p:txBody>
-          <a:bodyPr rtlCol="0" anchor="ctr"/>
-          <a:lstStyle/>
-          <a:p>
-            <a:pPr algn="ctr"/>
-          </a:p>
-        </p:txBody>
-      </p:sp>
-      <p:sp>
-        <p:nvSpPr>
-          <p:cNvPr id="45" name="Rectangle 44"/>
-          <p:cNvSpPr/>
-          <p:nvPr/>
-        </p:nvSpPr>
-        <p:spPr>
-          <a:xfrm>
-            <a:off x="9226296" y="4572000"/>
-            <a:ext cx="2834640" cy="365760"/>
-          </a:xfrm>
-          <a:prstGeom prst="rect">
-            <a:avLst/>
-          </a:prstGeom>
-          <a:solidFill>
-            <a:srgbClr val="E74C3C"/>
-          </a:solidFill>
-          <a:ln>
-            <a:solidFill>
-              <a:srgbClr val="FFFFFF"/>
-            </a:solidFill>
-          </a:ln>
-        </p:spPr>
-        <p:style>
-          <a:lnRef idx="1">
-            <a:schemeClr val="accent1"/>
-          </a:lnRef>
-          <a:fillRef idx="3">
-            <a:schemeClr val="accent1"/>
-          </a:fillRef>
-          <a:effectRef idx="2">
-            <a:schemeClr val="accent1"/>
-          </a:effectRef>
-          <a:fontRef idx="minor">
-            <a:schemeClr val="lt1"/>
-          </a:fontRef>
-        </p:style>
-        <p:txBody>
-          <a:bodyPr rtlCol="0" anchor="ctr"/>
-          <a:lstStyle/>
-          <a:p>
-            <a:pPr algn="ctr"/>
-          </a:p>
-        </p:txBody>
-      </p:sp>
-      <p:sp>
-        <p:nvSpPr>
-          <p:cNvPr id="46" name="TextBox 45"/>
-          <p:cNvSpPr txBox="1"/>
-          <p:nvPr/>
-        </p:nvSpPr>
-        <p:spPr>
-          <a:xfrm>
-            <a:off x="9299448" y="4626864"/>
-            <a:ext cx="731520" cy="292608"/>
-          </a:xfrm>
-          <a:prstGeom prst="rect">
-            <a:avLst/>
-          </a:prstGeom>
-          <a:noFill/>
-        </p:spPr>
-        <p:txBody>
-          <a:bodyPr wrap="square">
-            <a:spAutoFit/>
-          </a:bodyPr>
-          <a:lstStyle/>
-          <a:p>
-            <a:pPr algn="l"/>
-            <a:r>
-              <a:rPr sz="1000" b="1">
-                <a:solidFill>
-                  <a:srgbClr val="FFFFFF"/>
-                </a:solidFill>
-                <a:latin typeface="Meiryo"/>
-              </a:rPr>
-              <a:t>18.41</a:t>
-            </a:r>
-          </a:p>
-        </p:txBody>
-      </p:sp>
-      <p:sp>
-        <p:nvSpPr>
-          <p:cNvPr id="47" name="TextBox 46"/>
-          <p:cNvSpPr txBox="1"/>
-          <p:nvPr/>
-        </p:nvSpPr>
-        <p:spPr>
-          <a:xfrm>
-            <a:off x="9317736" y="5029200"/>
+            <a:off x="7818119" y="5029200"/>
             <a:ext cx="2651760" cy="685800"/>
           </a:xfrm>
           <a:prstGeom prst="rect">
@@ -14001,13 +14037,13 @@
       </p:sp>
       <p:sp>
         <p:nvSpPr>
-          <p:cNvPr id="48" name="TextBox 47"/>
-          <p:cNvSpPr txBox="1"/>
-          <p:nvPr/>
-        </p:nvSpPr>
-        <p:spPr>
-          <a:xfrm>
-            <a:off x="9317736" y="5760720"/>
+          <p:cNvPr id="43" name="TextBox 42"/>
+          <p:cNvSpPr txBox="1"/>
+          <p:nvPr/>
+        </p:nvSpPr>
+        <p:spPr>
+          <a:xfrm>
+            <a:off x="7818119" y="5760720"/>
             <a:ext cx="2651760" cy="777240"/>
           </a:xfrm>
           <a:prstGeom prst="rect">
@@ -14029,8 +14065,8 @@
                 </a:solidFill>
                 <a:latin typeface="Meiryo"/>
               </a:rPr>
-              <a:t>片脚でのデプスジャンプ
-最も高難度</a:t>
+              <a:t>片足で着地して跳ぶ
+十分な経験がある場合のみ</a:t>
             </a:r>
           </a:p>
         </p:txBody>
@@ -14483,7 +14519,7 @@
                 </a:solidFill>
                 <a:latin typeface="Meiryo"/>
               </a:rPr>
-              <a:t>MB 0.9-3.6kg</a:t>
+              <a:t>MB 0.9〜3.6kg</a:t>
             </a:r>
           </a:p>
         </p:txBody>
@@ -14518,8 +14554,8 @@
                 </a:solidFill>
                 <a:latin typeface="Meiryo"/>
               </a:rPr>
-              <a:t>胸からパートナーに
-素早くパス</a:t>
+              <a:t>胸から両腕で投げ
+ただちに投げ返す</a:t>
             </a:r>
           </a:p>
         </p:txBody>
@@ -14714,8 +14750,8 @@
                 </a:solidFill>
                 <a:latin typeface="Meiryo"/>
               </a:rPr>
-              <a:t>オーバーヘッド
-スロー</a:t>
+              <a:t>トゥーハンド
+オーバーヘッドスロー</a:t>
             </a:r>
           </a:p>
         </p:txBody>
@@ -14750,7 +14786,7 @@
                 </a:solidFill>
                 <a:latin typeface="Meiryo"/>
               </a:rPr>
-              <a:t>MB 0.9-3.6kg</a:t>
+              <a:t>MB 0.9〜3.6kg</a:t>
             </a:r>
           </a:p>
         </p:txBody>
@@ -14785,8 +14821,8 @@
                 </a:solidFill>
                 <a:latin typeface="Meiryo"/>
               </a:rPr>
-              <a:t>頭上から両手で
-前方に投げる</a:t>
+              <a:t>頭上から投げ
+頭上でキャッチ</a:t>
             </a:r>
           </a:p>
         </p:txBody>
@@ -14851,7 +14887,7 @@
             <a:avLst/>
           </a:prstGeom>
           <a:solidFill>
-            <a:srgbClr val="F39C12"/>
+            <a:srgbClr val="27AE60"/>
           </a:solidFill>
           <a:ln>
             <a:solidFill>
@@ -14946,7 +14982,7 @@
                 </a:solidFill>
                 <a:latin typeface="Meiryo"/>
               </a:rPr>
-              <a:t>中</a:t>
+              <a:t>低</a:t>
             </a:r>
           </a:p>
         </p:txBody>
@@ -14981,8 +15017,8 @@
                 </a:solidFill>
                 <a:latin typeface="Meiryo"/>
               </a:rPr>
-              <a:t>サイドトゥーサイド
-スロー</a:t>
+              <a:t>トゥーハンド
+サイドトゥーサイドスロー</a:t>
             </a:r>
           </a:p>
         </p:txBody>
@@ -15017,7 +15053,7 @@
                 </a:solidFill>
                 <a:latin typeface="Meiryo"/>
               </a:rPr>
-              <a:t>MB 0.9-3.6kg</a:t>
+              <a:t>MB 0.9〜3.6kg</a:t>
             </a:r>
           </a:p>
         </p:txBody>
@@ -15052,8 +15088,8 @@
                 </a:solidFill>
                 <a:latin typeface="Meiryo"/>
               </a:rPr>
-              <a:t>体を回旋させながら
-サイドに投げる</a:t>
+              <a:t>片側の肩の上から投げ
+反対の肩の上でキャッチ</a:t>
             </a:r>
           </a:p>
         </p:txBody>
@@ -15284,7 +15320,7 @@
                 </a:solidFill>
                 <a:latin typeface="Meiryo"/>
               </a:rPr>
-              <a:t>MB 0.5-1.5kg</a:t>
+              <a:t>MB 0.5〜2.3kg</a:t>
             </a:r>
           </a:p>
         </p:txBody>
@@ -15319,8 +15355,8 @@
                 </a:solidFill>
                 <a:latin typeface="Meiryo"/>
               </a:rPr>
-              <a:t>片腕で投げる
-体幹回旋も使う</a:t>
+              <a:t>肩90°外転・肘90°屈曲
+から片腕で投げる</a:t>
             </a:r>
           </a:p>
         </p:txBody>
@@ -15551,7 +15587,7 @@
                 </a:solidFill>
                 <a:latin typeface="Meiryo"/>
               </a:rPr>
-              <a:t>MB 0.9-3.6kg</a:t>
+              <a:t>MB 0.9〜3.6kg＋ボックス</a:t>
             </a:r>
           </a:p>
         </p:txBody>
@@ -15586,8 +15622,8 @@
                 </a:solidFill>
                 <a:latin typeface="Meiryo"/>
               </a:rPr>
-              <a:t>パートナーが落とした
-ボールを瞬時に返す</a:t>
+              <a:t>仰向けで落ちてきたボールを
+キャッチしてただちに返す</a:t>
             </a:r>
           </a:p>
         </p:txBody>
@@ -15818,7 +15854,7 @@
                 </a:solidFill>
                 <a:latin typeface="Meiryo"/>
               </a:rPr>
-              <a:t>MB 2.3-3.6kg</a:t>
+              <a:t>MB 2.3〜3.6kg</a:t>
             </a:r>
           </a:p>
         </p:txBody>
@@ -15853,8 +15889,8 @@
                 </a:solidFill>
                 <a:latin typeface="Meiryo"/>
               </a:rPr>
-              <a:t>腕立てのプライオ
-メトリック版</a:t>
+              <a:t>ボールから手を外して受け
+ただちに押し返す</a:t>
             </a:r>
           </a:p>
         </p:txBody>
@@ -16085,7 +16121,7 @@
                 </a:solidFill>
                 <a:latin typeface="Meiryo"/>
               </a:rPr>
-              <a:t>MB 0.9-3.6kg</a:t>
+              <a:t>MB 0.9〜3.6kg</a:t>
             </a:r>
           </a:p>
         </p:txBody>
@@ -16120,8 +16156,8 @@
                 </a:solidFill>
                 <a:latin typeface="Meiryo"/>
               </a:rPr>
-              <a:t>体幹回旋力の
-爆発的な発揮</a:t>
+              <a:t>体幹の伸展を抑え
+主に腹筋で投げ返す</a:t>
             </a:r>
           </a:p>
         </p:txBody>
@@ -16607,8 +16643,8 @@
         </p:nvSpPr>
         <p:spPr>
           <a:xfrm>
-            <a:off x="2103120" y="2011680"/>
-            <a:ext cx="3657600" cy="530352"/>
+            <a:off x="2103120" y="1956816"/>
+            <a:ext cx="3703320" cy="640080"/>
           </a:xfrm>
           <a:prstGeom prst="rect">
             <a:avLst/>
@@ -16623,13 +16659,14 @@
           <a:p>
             <a:pPr algn="l"/>
             <a:r>
-              <a:rPr sz="1200" b="0">
+              <a:rPr sz="1100" b="0">
                 <a:solidFill>
                   <a:srgbClr val="1A3A5C"/>
                 </a:solidFill>
                 <a:latin typeface="Meiryo"/>
               </a:rPr>
-              <a:t>スクワット等の基本動作を正しく行える</a:t>
+              <a:t>着地：肩・膝がつま先の上
+膝が内に入らない（動的外反に注意）</a:t>
             </a:r>
           </a:p>
         </p:txBody>
@@ -16709,7 +16746,7 @@
                 </a:solidFill>
                 <a:latin typeface="Meiryo"/>
               </a:rPr>
-              <a:t>筋力（下半身）</a:t>
+              <a:t>筋力</a:t>
             </a:r>
           </a:p>
         </p:txBody>
@@ -16767,8 +16804,8 @@
         </p:nvSpPr>
         <p:spPr>
           <a:xfrm>
-            <a:off x="2103120" y="2926080"/>
-            <a:ext cx="3657600" cy="530352"/>
+            <a:off x="2103120" y="2871216"/>
+            <a:ext cx="3703320" cy="640080"/>
           </a:xfrm>
           <a:prstGeom prst="rect">
             <a:avLst/>
@@ -16783,13 +16820,14 @@
           <a:p>
             <a:pPr algn="l"/>
             <a:r>
-              <a:rPr sz="1200" b="0">
+              <a:rPr sz="1100" b="0">
                 <a:solidFill>
                   <a:srgbClr val="1A3A5C"/>
                 </a:solidFill>
                 <a:latin typeface="Meiryo"/>
               </a:rPr>
-              <a:t>体重×1.5倍のバーベルスクワット</a:t>
+              <a:t>スクワット1RM ≧ 体重×1.5（下半身）
+※より重視すべきはテクニック</a:t>
             </a:r>
           </a:p>
         </p:txBody>
@@ -16869,7 +16907,7 @@
                 </a:solidFill>
                 <a:latin typeface="Meiryo"/>
               </a:rPr>
-              <a:t>筋力（上半身）</a:t>
+              <a:t>バランス</a:t>
             </a:r>
           </a:p>
         </p:txBody>
@@ -16927,8 +16965,8 @@
         </p:nvSpPr>
         <p:spPr>
           <a:xfrm>
-            <a:off x="2103120" y="3840479"/>
-            <a:ext cx="3657600" cy="530352"/>
+            <a:off x="2103120" y="3785615"/>
+            <a:ext cx="3703320" cy="640080"/>
           </a:xfrm>
           <a:prstGeom prst="rect">
             <a:avLst/>
@@ -16943,13 +16981,14 @@
           <a:p>
             <a:pPr algn="l"/>
             <a:r>
-              <a:rPr sz="1200" b="0">
+              <a:rPr sz="1100" b="0">
                 <a:solidFill>
                   <a:srgbClr val="1A3A5C"/>
                 </a:solidFill>
                 <a:latin typeface="Meiryo"/>
               </a:rPr>
-              <a:t>体重×60%のパワークリーン</a:t>
+              <a:t>初めて：片脚立ち30秒
+上級前：片脚ハーフスクワット30秒</a:t>
             </a:r>
           </a:p>
         </p:txBody>
@@ -17029,7 +17068,7 @@
                 </a:solidFill>
                 <a:latin typeface="Meiryo"/>
               </a:rPr>
-              <a:t>バランス（中級）</a:t>
+              <a:t>体重</a:t>
             </a:r>
           </a:p>
         </p:txBody>
@@ -17087,8 +17126,8 @@
         </p:nvSpPr>
         <p:spPr>
           <a:xfrm>
-            <a:off x="2103120" y="4754879"/>
-            <a:ext cx="3657600" cy="530352"/>
+            <a:off x="2103120" y="4700016"/>
+            <a:ext cx="3703320" cy="640080"/>
           </a:xfrm>
           <a:prstGeom prst="rect">
             <a:avLst/>
@@ -17103,13 +17142,14 @@
           <a:p>
             <a:pPr algn="l"/>
             <a:r>
-              <a:rPr sz="1200" b="0">
+              <a:rPr sz="1100" b="0">
                 <a:solidFill>
                   <a:srgbClr val="1A3A5C"/>
                 </a:solidFill>
                 <a:latin typeface="Meiryo"/>
               </a:rPr>
-              <a:t>スタンディング・クォータースクワット片脚</a:t>
+              <a:t>100kg以上：高量・高強度と
+46cm超のデプスジャンプは避ける</a:t>
             </a:r>
           </a:p>
         </p:txBody>
@@ -17189,7 +17229,7 @@
                 </a:solidFill>
                 <a:latin typeface="Meiryo"/>
               </a:rPr>
-              <a:t>バランス（上級）</a:t>
+              <a:t>既往歴</a:t>
             </a:r>
           </a:p>
         </p:txBody>
@@ -17247,8 +17287,8 @@
         </p:nvSpPr>
         <p:spPr>
           <a:xfrm>
-            <a:off x="2103120" y="5669279"/>
-            <a:ext cx="3657600" cy="530352"/>
+            <a:off x="2103120" y="5614416"/>
+            <a:ext cx="3703320" cy="640080"/>
           </a:xfrm>
           <a:prstGeom prst="rect">
             <a:avLst/>
@@ -17263,13 +17303,14 @@
           <a:p>
             <a:pPr algn="l"/>
             <a:r>
-              <a:rPr sz="1200" b="0">
+              <a:rPr sz="1100" b="0">
                 <a:solidFill>
                   <a:srgbClr val="1A3A5C"/>
                 </a:solidFill>
                 <a:latin typeface="Meiryo"/>
               </a:rPr>
-              <a:t>ハーフスクワット片脚バランス</a:t>
+              <a:t>脊柱・上下肢のケガ、関節の不安定性
+などがあれば慎重に</a:t>
             </a:r>
           </a:p>
         </p:txBody>
@@ -17474,7 +17515,7 @@
                 </a:solidFill>
                 <a:latin typeface="Meiryo"/>
               </a:rPr>
-              <a:t>床面</a:t>
+              <a:t>着地面</a:t>
             </a:r>
           </a:p>
         </p:txBody>
@@ -17554,8 +17595,8 @@
                 </a:solidFill>
                 <a:latin typeface="Meiryo"/>
               </a:rPr>
-              <a:t>芝生・木製フロア・マット
-（コンクリート不可）</a:t>
+              <a:t>芝生・懸架式木製フロア・ゴムマット
+（コンクリート・タイル・固い床は不可）</a:t>
             </a:r>
           </a:p>
         </p:txBody>
@@ -17635,7 +17676,7 @@
                 </a:solidFill>
                 <a:latin typeface="Meiryo"/>
               </a:rPr>
-              <a:t>天井高</a:t>
+              <a:t>スペース</a:t>
             </a:r>
           </a:p>
         </p:txBody>
@@ -17715,7 +17756,7 @@
                 </a:solidFill>
                 <a:latin typeface="Meiryo"/>
               </a:rPr>
-              <a:t>4m以上推奨</a:t>
+              <a:t>天井高3〜4m／バウンド系は30m以上</a:t>
             </a:r>
           </a:p>
         </p:txBody>
@@ -17795,7 +17836,7 @@
                 </a:solidFill>
                 <a:latin typeface="Meiryo"/>
               </a:rPr>
-              <a:t>ボックス高さ</a:t>
+              <a:t>デプス高さ</a:t>
             </a:r>
           </a:p>
         </p:txBody>
@@ -17875,7 +17916,8 @@
                 </a:solidFill>
                 <a:latin typeface="Meiryo"/>
               </a:rPr>
-              <a:t>最大1.2m（100kg超：46cm以下）</a:t>
+              <a:t>41〜107cm（一般的に76〜81cm）
+100kg以上は46cm以下</a:t>
             </a:r>
           </a:p>
         </p:txBody>
@@ -18035,8 +18077,8 @@
                 </a:solidFill>
                 <a:latin typeface="Meiryo"/>
               </a:rPr>
-              <a:t>足首サポート・横安定性重視
-（テニス・バスケ用が最適）</a:t>
+              <a:t>足首・アーチのサポートと横の安定性
+（ランニングシューズは不向き）</a:t>
             </a:r>
           </a:p>
         </p:txBody>
@@ -18196,7 +18238,7 @@
                 </a:solidFill>
                 <a:latin typeface="Meiryo"/>
               </a:rPr>
-              <a:t>常時指導者が監視</a:t>
+              <a:t>常に正しいテクニックか監視する</a:t>
             </a:r>
           </a:p>
         </p:txBody>
@@ -18544,8 +18586,7 @@
                 </a:solidFill>
                 <a:latin typeface="Meiryo"/>
               </a:rPr>
-              <a:t>青年期
-（中高生）</a:t>
+              <a:t>思春期前・青年期</a:t>
             </a:r>
           </a:p>
         </p:txBody>
@@ -18603,8 +18644,8 @@
         </p:nvSpPr>
         <p:spPr>
           <a:xfrm>
-            <a:off x="457200" y="2148840"/>
-            <a:ext cx="3383280" cy="1005840"/>
+            <a:off x="457200" y="2103120"/>
+            <a:ext cx="3383280" cy="1097280"/>
           </a:xfrm>
           <a:prstGeom prst="rect">
             <a:avLst/>
@@ -18625,9 +18666,9 @@
                 </a:solidFill>
                 <a:latin typeface="Meiryo"/>
               </a:rPr>
-              <a:t>低〜中強度を推奨
-デプスジャンプ非推奨
-テクニック最優先</a:t>
+              <a:t>監視下なら実施できる
+デプスジャンプと高強度の
+下半身ドリルは禁忌</a:t>
             </a:r>
           </a:p>
         </p:txBody>
@@ -18656,15 +18697,17 @@
           <a:p>
             <a:pPr algn="l"/>
             <a:r>
-              <a:rPr sz="1300" b="0">
+              <a:rPr sz="1200" b="0">
                 <a:solidFill>
                   <a:srgbClr val="1A3A5C"/>
                 </a:solidFill>
                 <a:latin typeface="Meiryo"/>
               </a:rPr>
-              <a:t>● 大人と同じドリルは実施可能
-● ただし高強度下半身は避ける
-● 骨端板への配慮が必要</a:t>
+              <a:t>● 骨端線が閉じていない時期は特に注意
+● 単純なドリル→複雑なドリルへ
+● 動作の質（アライメント）を重視
+● 外反（膝が内に入る）に注意
+● ワークアウト間は2〜3日以上</a:t>
             </a:r>
           </a:p>
         </p:txBody>
@@ -18789,8 +18832,7 @@
                 </a:solidFill>
                 <a:latin typeface="Meiryo"/>
               </a:rPr>
-              <a:t>成人
-（通常）</a:t>
+              <a:t>成人</a:t>
             </a:r>
           </a:p>
         </p:txBody>
@@ -18848,8 +18890,8 @@
         </p:nvSpPr>
         <p:spPr>
           <a:xfrm>
-            <a:off x="4480560" y="2148840"/>
-            <a:ext cx="3383280" cy="1005840"/>
+            <a:off x="4480560" y="2103120"/>
+            <a:ext cx="3383280" cy="1097280"/>
           </a:xfrm>
           <a:prstGeom prst="rect">
             <a:avLst/>
@@ -18870,8 +18912,8 @@
                 </a:solidFill>
                 <a:latin typeface="Meiryo"/>
               </a:rPr>
-              <a:t>段階的なプログラムを実施
-ニーズ分析に基づく</a:t>
+              <a:t>ニーズ分析にもとづき
+段階的に進める</a:t>
             </a:r>
           </a:p>
         </p:txBody>
@@ -18900,15 +18942,15 @@
           <a:p>
             <a:pPr algn="l"/>
             <a:r>
-              <a:rPr sz="1300" b="0">
+              <a:rPr sz="1200" b="0">
                 <a:solidFill>
                   <a:srgbClr val="1A3A5C"/>
                 </a:solidFill>
                 <a:latin typeface="Meiryo"/>
               </a:rPr>
-              <a:t>● 漸進性の原則を適用
-● 定期的な評価と更新
-● レジスタンスと組み合わせる</a:t>
+              <a:t>● 漸進的過負荷の原則
+● 強度を上げたら量を減らす
+● セッション間48〜72時間</a:t>
             </a:r>
           </a:p>
         </p:txBody>
@@ -19033,8 +19075,7 @@
                 </a:solidFill>
                 <a:latin typeface="Meiryo"/>
               </a:rPr>
-              <a:t>マスターズ
-（高齢者）</a:t>
+              <a:t>マスターズ</a:t>
             </a:r>
           </a:p>
         </p:txBody>
@@ -19092,8 +19133,8 @@
         </p:nvSpPr>
         <p:spPr>
           <a:xfrm>
-            <a:off x="8503920" y="2148840"/>
-            <a:ext cx="3383280" cy="1005840"/>
+            <a:off x="8503920" y="2103120"/>
+            <a:ext cx="3383280" cy="1097280"/>
           </a:xfrm>
           <a:prstGeom prst="rect">
             <a:avLst/>
@@ -19114,8 +19155,8 @@
                 </a:solidFill>
                 <a:latin typeface="Meiryo"/>
               </a:rPr>
-              <a:t>強度・量を下げる
-ウォームアップを充実</a:t>
+              <a:t>低〜中強度・最大5種目
+接地回数を減らす</a:t>
             </a:r>
           </a:p>
         </p:txBody>
@@ -19144,15 +19185,17 @@
           <a:p>
             <a:pPr algn="l"/>
             <a:r>
-              <a:rPr sz="1300" b="0">
+              <a:rPr sz="1200" b="0">
                 <a:solidFill>
                   <a:srgbClr val="1A3A5C"/>
                 </a:solidFill>
                 <a:latin typeface="Meiryo"/>
               </a:rPr>
-              <a:t>● 筋力・骨密度・柔軟性の低下を考慮
-● 個人差が大きい
-● 転倒リスクの管理が重要</a:t>
+              <a:t>● ワークアウト間は3〜4日
+● 整形外科的な既往を確認
+● 半月板切除・関節変性が著しい
+　場合はデプス・片脚系は禁忌
+● 慢性的な痛みがあれば修正</a:t>
             </a:r>
           </a:p>
         </p:txBody>
@@ -19500,7 +19543,7 @@
                 </a:solidFill>
                 <a:latin typeface="Meiryo"/>
               </a:rPr>
-              <a:t>コンビネーショントレーニング ─ 週スケジュール例</a:t>
+              <a:t>週スケジュール例（同じ日は「高強度×低強度」「上半身×下半身」）</a:t>
             </a:r>
           </a:p>
         </p:txBody>
@@ -19513,8 +19556,8 @@
         </p:nvSpPr>
         <p:spPr>
           <a:xfrm>
-            <a:off x="457200" y="1874519"/>
-            <a:ext cx="2103120" cy="502920"/>
+            <a:off x="548640" y="1874519"/>
+            <a:ext cx="2651760" cy="502920"/>
           </a:xfrm>
           <a:prstGeom prst="rect">
             <a:avLst/>
@@ -19558,8 +19601,8 @@
         </p:nvSpPr>
         <p:spPr>
           <a:xfrm>
-            <a:off x="502920" y="1920240"/>
-            <a:ext cx="2011680" cy="411480"/>
+            <a:off x="594360" y="1920240"/>
+            <a:ext cx="2560320" cy="411480"/>
           </a:xfrm>
           <a:prstGeom prst="rect">
             <a:avLst/>
@@ -19593,8 +19636,8 @@
         </p:nvSpPr>
         <p:spPr>
           <a:xfrm>
-            <a:off x="457200" y="2514600"/>
-            <a:ext cx="2103120" cy="320040"/>
+            <a:off x="548640" y="2514600"/>
+            <a:ext cx="2651760" cy="320040"/>
           </a:xfrm>
           <a:prstGeom prst="rect">
             <a:avLst/>
@@ -19638,8 +19681,8 @@
         </p:nvSpPr>
         <p:spPr>
           <a:xfrm>
-            <a:off x="502920" y="2542032"/>
-            <a:ext cx="2011680" cy="274320"/>
+            <a:off x="594360" y="2542032"/>
+            <a:ext cx="2560320" cy="274320"/>
           </a:xfrm>
           <a:prstGeom prst="rect">
             <a:avLst/>
@@ -19673,8 +19716,8 @@
         </p:nvSpPr>
         <p:spPr>
           <a:xfrm>
-            <a:off x="457200" y="2880360"/>
-            <a:ext cx="2103120" cy="731520"/>
+            <a:off x="548640" y="2880360"/>
+            <a:ext cx="2651760" cy="731520"/>
           </a:xfrm>
           <a:prstGeom prst="rect">
             <a:avLst/>
@@ -19718,23 +19761,23 @@
         </p:nvSpPr>
         <p:spPr>
           <a:xfrm>
-            <a:off x="502920" y="2926080"/>
-            <a:ext cx="2011680" cy="594360"/>
-          </a:xfrm>
-          <a:prstGeom prst="rect">
-            <a:avLst/>
-          </a:prstGeom>
-          <a:noFill/>
-        </p:spPr>
-        <p:txBody>
-          <a:bodyPr wrap="square">
-            <a:spAutoFit/>
-          </a:bodyPr>
-          <a:lstStyle/>
-          <a:p>
-            <a:pPr algn="ctr"/>
-            <a:r>
-              <a:rPr sz="1200" b="1">
+            <a:off x="594360" y="2926080"/>
+            <a:ext cx="2560320" cy="594360"/>
+          </a:xfrm>
+          <a:prstGeom prst="rect">
+            <a:avLst/>
+          </a:prstGeom>
+          <a:noFill/>
+        </p:spPr>
+        <p:txBody>
+          <a:bodyPr wrap="square">
+            <a:spAutoFit/>
+          </a:bodyPr>
+          <a:lstStyle/>
+          <a:p>
+            <a:pPr algn="ctr"/>
+            <a:r>
+              <a:rPr sz="1300" b="1">
                 <a:solidFill>
                   <a:srgbClr val="FFFFFF"/>
                 </a:solidFill>
@@ -19753,14 +19796,14 @@
         </p:nvSpPr>
         <p:spPr>
           <a:xfrm>
-            <a:off x="457200" y="3749039"/>
-            <a:ext cx="2103120" cy="320040"/>
-          </a:xfrm>
-          <a:prstGeom prst="rect">
-            <a:avLst/>
-          </a:prstGeom>
-          <a:solidFill>
-            <a:srgbClr val="27AE60"/>
+            <a:off x="548640" y="3749039"/>
+            <a:ext cx="2651760" cy="320040"/>
+          </a:xfrm>
+          <a:prstGeom prst="rect">
+            <a:avLst/>
+          </a:prstGeom>
+          <a:solidFill>
+            <a:srgbClr val="1F5C8B"/>
           </a:solidFill>
           <a:ln>
             <a:solidFill>
@@ -19798,8 +19841,8 @@
         </p:nvSpPr>
         <p:spPr>
           <a:xfrm>
-            <a:off x="502920" y="3776472"/>
-            <a:ext cx="2011680" cy="274320"/>
+            <a:off x="594360" y="3776472"/>
+            <a:ext cx="2560320" cy="274320"/>
           </a:xfrm>
           <a:prstGeom prst="rect">
             <a:avLst/>
@@ -19833,8 +19876,8 @@
         </p:nvSpPr>
         <p:spPr>
           <a:xfrm>
-            <a:off x="457200" y="4114800"/>
-            <a:ext cx="2103120" cy="731520"/>
+            <a:off x="548640" y="4114800"/>
+            <a:ext cx="2651760" cy="731520"/>
           </a:xfrm>
           <a:prstGeom prst="rect">
             <a:avLst/>
@@ -19878,23 +19921,23 @@
         </p:nvSpPr>
         <p:spPr>
           <a:xfrm>
-            <a:off x="502920" y="4160520"/>
-            <a:ext cx="2011680" cy="594360"/>
-          </a:xfrm>
-          <a:prstGeom prst="rect">
-            <a:avLst/>
-          </a:prstGeom>
-          <a:noFill/>
-        </p:spPr>
-        <p:txBody>
-          <a:bodyPr wrap="square">
-            <a:spAutoFit/>
-          </a:bodyPr>
-          <a:lstStyle/>
-          <a:p>
-            <a:pPr algn="ctr"/>
-            <a:r>
-              <a:rPr sz="1200" b="1">
+            <a:off x="594360" y="4160520"/>
+            <a:ext cx="2560320" cy="594360"/>
+          </a:xfrm>
+          <a:prstGeom prst="rect">
+            <a:avLst/>
+          </a:prstGeom>
+          <a:noFill/>
+        </p:spPr>
+        <p:txBody>
+          <a:bodyPr wrap="square">
+            <a:spAutoFit/>
+          </a:bodyPr>
+          <a:lstStyle/>
+          <a:p>
+            <a:pPr algn="ctr"/>
+            <a:r>
+              <a:rPr sz="1300" b="1">
                 <a:solidFill>
                   <a:srgbClr val="FFFFFF"/>
                 </a:solidFill>
@@ -19913,8 +19956,8 @@
         </p:nvSpPr>
         <p:spPr>
           <a:xfrm>
-            <a:off x="2743200" y="1874519"/>
-            <a:ext cx="2103120" cy="502920"/>
+            <a:off x="3383280" y="1874519"/>
+            <a:ext cx="2651760" cy="502920"/>
           </a:xfrm>
           <a:prstGeom prst="rect">
             <a:avLst/>
@@ -19958,8 +20001,8 @@
         </p:nvSpPr>
         <p:spPr>
           <a:xfrm>
-            <a:off x="2788920" y="1920240"/>
-            <a:ext cx="2011680" cy="411480"/>
+            <a:off x="3429000" y="1920240"/>
+            <a:ext cx="2560320" cy="411480"/>
           </a:xfrm>
           <a:prstGeom prst="rect">
             <a:avLst/>
@@ -19993,8 +20036,8 @@
         </p:nvSpPr>
         <p:spPr>
           <a:xfrm>
-            <a:off x="2743200" y="2514600"/>
-            <a:ext cx="2103120" cy="320040"/>
+            <a:off x="3383280" y="2514600"/>
+            <a:ext cx="2651760" cy="320040"/>
           </a:xfrm>
           <a:prstGeom prst="rect">
             <a:avLst/>
@@ -20038,8 +20081,8 @@
         </p:nvSpPr>
         <p:spPr>
           <a:xfrm>
-            <a:off x="2788920" y="2542032"/>
-            <a:ext cx="2011680" cy="274320"/>
+            <a:off x="3429000" y="2542032"/>
+            <a:ext cx="2560320" cy="274320"/>
           </a:xfrm>
           <a:prstGeom prst="rect">
             <a:avLst/>
@@ -20073,8 +20116,8 @@
         </p:nvSpPr>
         <p:spPr>
           <a:xfrm>
-            <a:off x="2743200" y="2880360"/>
-            <a:ext cx="2103120" cy="731520"/>
+            <a:off x="3383280" y="2880360"/>
+            <a:ext cx="2651760" cy="731520"/>
           </a:xfrm>
           <a:prstGeom prst="rect">
             <a:avLst/>
@@ -20118,29 +20161,29 @@
         </p:nvSpPr>
         <p:spPr>
           <a:xfrm>
-            <a:off x="2788920" y="2926080"/>
-            <a:ext cx="2011680" cy="594360"/>
-          </a:xfrm>
-          <a:prstGeom prst="rect">
-            <a:avLst/>
-          </a:prstGeom>
-          <a:noFill/>
-        </p:spPr>
-        <p:txBody>
-          <a:bodyPr wrap="square">
-            <a:spAutoFit/>
-          </a:bodyPr>
-          <a:lstStyle/>
-          <a:p>
-            <a:pPr algn="ctr"/>
-            <a:r>
-              <a:rPr sz="1200" b="1">
+            <a:off x="3429000" y="2926080"/>
+            <a:ext cx="2560320" cy="594360"/>
+          </a:xfrm>
+          <a:prstGeom prst="rect">
+            <a:avLst/>
+          </a:prstGeom>
+          <a:noFill/>
+        </p:spPr>
+        <p:txBody>
+          <a:bodyPr wrap="square">
+            <a:spAutoFit/>
+          </a:bodyPr>
+          <a:lstStyle/>
+          <a:p>
+            <a:pPr algn="ctr"/>
+            <a:r>
+              <a:rPr sz="1300" b="1">
                 <a:solidFill>
                   <a:srgbClr val="FFFFFF"/>
                 </a:solidFill>
                 <a:latin typeface="Meiryo"/>
               </a:rPr>
-              <a:t>低強度・上半身</a:t>
+              <a:t>低強度・下半身</a:t>
             </a:r>
           </a:p>
         </p:txBody>
@@ -20153,14 +20196,14 @@
         </p:nvSpPr>
         <p:spPr>
           <a:xfrm>
-            <a:off x="2743200" y="3749039"/>
-            <a:ext cx="2103120" cy="320040"/>
-          </a:xfrm>
-          <a:prstGeom prst="rect">
-            <a:avLst/>
-          </a:prstGeom>
-          <a:solidFill>
-            <a:srgbClr val="27AE60"/>
+            <a:off x="3383280" y="3749039"/>
+            <a:ext cx="2651760" cy="320040"/>
+          </a:xfrm>
+          <a:prstGeom prst="rect">
+            <a:avLst/>
+          </a:prstGeom>
+          <a:solidFill>
+            <a:srgbClr val="1F5C8B"/>
           </a:solidFill>
           <a:ln>
             <a:solidFill>
@@ -20198,8 +20241,8 @@
         </p:nvSpPr>
         <p:spPr>
           <a:xfrm>
-            <a:off x="2788920" y="3776472"/>
-            <a:ext cx="2011680" cy="274320"/>
+            <a:off x="3429000" y="3776472"/>
+            <a:ext cx="2560320" cy="274320"/>
           </a:xfrm>
           <a:prstGeom prst="rect">
             <a:avLst/>
@@ -20233,8 +20276,8 @@
         </p:nvSpPr>
         <p:spPr>
           <a:xfrm>
-            <a:off x="2743200" y="4114800"/>
-            <a:ext cx="2103120" cy="731520"/>
+            <a:off x="3383280" y="4114800"/>
+            <a:ext cx="2651760" cy="731520"/>
           </a:xfrm>
           <a:prstGeom prst="rect">
             <a:avLst/>
@@ -20278,29 +20321,29 @@
         </p:nvSpPr>
         <p:spPr>
           <a:xfrm>
-            <a:off x="2788920" y="4160520"/>
-            <a:ext cx="2011680" cy="594360"/>
-          </a:xfrm>
-          <a:prstGeom prst="rect">
-            <a:avLst/>
-          </a:prstGeom>
-          <a:noFill/>
-        </p:spPr>
-        <p:txBody>
-          <a:bodyPr wrap="square">
-            <a:spAutoFit/>
-          </a:bodyPr>
-          <a:lstStyle/>
-          <a:p>
-            <a:pPr algn="ctr"/>
-            <a:r>
-              <a:rPr sz="1200" b="1">
+            <a:off x="3429000" y="4160520"/>
+            <a:ext cx="2560320" cy="594360"/>
+          </a:xfrm>
+          <a:prstGeom prst="rect">
+            <a:avLst/>
+          </a:prstGeom>
+          <a:noFill/>
+        </p:spPr>
+        <p:txBody>
+          <a:bodyPr wrap="square">
+            <a:spAutoFit/>
+          </a:bodyPr>
+          <a:lstStyle/>
+          <a:p>
+            <a:pPr algn="ctr"/>
+            <a:r>
+              <a:rPr sz="1300" b="1">
                 <a:solidFill>
                   <a:srgbClr val="FFFFFF"/>
                 </a:solidFill>
                 <a:latin typeface="Meiryo"/>
               </a:rPr>
-              <a:t>高強度・下半身</a:t>
+              <a:t>高強度・上半身</a:t>
             </a:r>
           </a:p>
         </p:txBody>
@@ -20313,8 +20356,8 @@
         </p:nvSpPr>
         <p:spPr>
           <a:xfrm>
-            <a:off x="5029200" y="1874519"/>
-            <a:ext cx="2103120" cy="502920"/>
+            <a:off x="6217920" y="1874519"/>
+            <a:ext cx="2651760" cy="502920"/>
           </a:xfrm>
           <a:prstGeom prst="rect">
             <a:avLst/>
@@ -20358,8 +20401,8 @@
         </p:nvSpPr>
         <p:spPr>
           <a:xfrm>
-            <a:off x="5074920" y="1920240"/>
-            <a:ext cx="2011680" cy="411480"/>
+            <a:off x="6263640" y="1920240"/>
+            <a:ext cx="2560320" cy="411480"/>
           </a:xfrm>
           <a:prstGeom prst="rect">
             <a:avLst/>
@@ -20393,8 +20436,8 @@
         </p:nvSpPr>
         <p:spPr>
           <a:xfrm>
-            <a:off x="5029200" y="2514600"/>
-            <a:ext cx="2103120" cy="320040"/>
+            <a:off x="6217920" y="2514600"/>
+            <a:ext cx="2651760" cy="320040"/>
           </a:xfrm>
           <a:prstGeom prst="rect">
             <a:avLst/>
@@ -20438,8 +20481,8 @@
         </p:nvSpPr>
         <p:spPr>
           <a:xfrm>
-            <a:off x="5074920" y="2542032"/>
-            <a:ext cx="2011680" cy="274320"/>
+            <a:off x="6263640" y="2542032"/>
+            <a:ext cx="2560320" cy="274320"/>
           </a:xfrm>
           <a:prstGeom prst="rect">
             <a:avLst/>
@@ -20473,14 +20516,14 @@
         </p:nvSpPr>
         <p:spPr>
           <a:xfrm>
-            <a:off x="5029200" y="2880360"/>
-            <a:ext cx="2103120" cy="731520"/>
-          </a:xfrm>
-          <a:prstGeom prst="rect">
-            <a:avLst/>
-          </a:prstGeom>
-          <a:solidFill>
-            <a:srgbClr val="E74C3C"/>
+            <a:off x="6217920" y="2880360"/>
+            <a:ext cx="2651760" cy="731520"/>
+          </a:xfrm>
+          <a:prstGeom prst="rect">
+            <a:avLst/>
+          </a:prstGeom>
+          <a:solidFill>
+            <a:srgbClr val="27AE60"/>
           </a:solidFill>
           <a:ln>
             <a:solidFill>
@@ -20518,29 +20561,29 @@
         </p:nvSpPr>
         <p:spPr>
           <a:xfrm>
-            <a:off x="5074920" y="2926080"/>
-            <a:ext cx="2011680" cy="594360"/>
-          </a:xfrm>
-          <a:prstGeom prst="rect">
-            <a:avLst/>
-          </a:prstGeom>
-          <a:noFill/>
-        </p:spPr>
-        <p:txBody>
-          <a:bodyPr wrap="square">
-            <a:spAutoFit/>
-          </a:bodyPr>
-          <a:lstStyle/>
-          <a:p>
-            <a:pPr algn="ctr"/>
-            <a:r>
-              <a:rPr sz="1200" b="1">
+            <a:off x="6263640" y="2926080"/>
+            <a:ext cx="2560320" cy="594360"/>
+          </a:xfrm>
+          <a:prstGeom prst="rect">
+            <a:avLst/>
+          </a:prstGeom>
+          <a:noFill/>
+        </p:spPr>
+        <p:txBody>
+          <a:bodyPr wrap="square">
+            <a:spAutoFit/>
+          </a:bodyPr>
+          <a:lstStyle/>
+          <a:p>
+            <a:pPr algn="ctr"/>
+            <a:r>
+              <a:rPr sz="1300" b="1">
                 <a:solidFill>
                   <a:srgbClr val="FFFFFF"/>
                 </a:solidFill>
                 <a:latin typeface="Meiryo"/>
               </a:rPr>
-              <a:t>高強度・上半身</a:t>
+              <a:t>低強度・上半身</a:t>
             </a:r>
           </a:p>
         </p:txBody>
@@ -20553,14 +20596,14 @@
         </p:nvSpPr>
         <p:spPr>
           <a:xfrm>
-            <a:off x="5029200" y="3749039"/>
-            <a:ext cx="2103120" cy="320040"/>
-          </a:xfrm>
-          <a:prstGeom prst="rect">
-            <a:avLst/>
-          </a:prstGeom>
-          <a:solidFill>
-            <a:srgbClr val="27AE60"/>
+            <a:off x="6217920" y="3749039"/>
+            <a:ext cx="2651760" cy="320040"/>
+          </a:xfrm>
+          <a:prstGeom prst="rect">
+            <a:avLst/>
+          </a:prstGeom>
+          <a:solidFill>
+            <a:srgbClr val="1F5C8B"/>
           </a:solidFill>
           <a:ln>
             <a:solidFill>
@@ -20598,8 +20641,8 @@
         </p:nvSpPr>
         <p:spPr>
           <a:xfrm>
-            <a:off x="5074920" y="3776472"/>
-            <a:ext cx="2011680" cy="274320"/>
+            <a:off x="6263640" y="3776472"/>
+            <a:ext cx="2560320" cy="274320"/>
           </a:xfrm>
           <a:prstGeom prst="rect">
             <a:avLst/>
@@ -20633,14 +20676,14 @@
         </p:nvSpPr>
         <p:spPr>
           <a:xfrm>
-            <a:off x="5029200" y="4114800"/>
-            <a:ext cx="2103120" cy="731520"/>
-          </a:xfrm>
-          <a:prstGeom prst="rect">
-            <a:avLst/>
-          </a:prstGeom>
-          <a:solidFill>
-            <a:srgbClr val="27AE60"/>
+            <a:off x="6217920" y="4114800"/>
+            <a:ext cx="2651760" cy="731520"/>
+          </a:xfrm>
+          <a:prstGeom prst="rect">
+            <a:avLst/>
+          </a:prstGeom>
+          <a:solidFill>
+            <a:srgbClr val="E74C3C"/>
           </a:solidFill>
           <a:ln>
             <a:solidFill>
@@ -20678,29 +20721,29 @@
         </p:nvSpPr>
         <p:spPr>
           <a:xfrm>
-            <a:off x="5074920" y="4160520"/>
-            <a:ext cx="2011680" cy="594360"/>
-          </a:xfrm>
-          <a:prstGeom prst="rect">
-            <a:avLst/>
-          </a:prstGeom>
-          <a:noFill/>
-        </p:spPr>
-        <p:txBody>
-          <a:bodyPr wrap="square">
-            <a:spAutoFit/>
-          </a:bodyPr>
-          <a:lstStyle/>
-          <a:p>
-            <a:pPr algn="ctr"/>
-            <a:r>
-              <a:rPr sz="1200" b="1">
+            <a:off x="6263640" y="4160520"/>
+            <a:ext cx="2560320" cy="594360"/>
+          </a:xfrm>
+          <a:prstGeom prst="rect">
+            <a:avLst/>
+          </a:prstGeom>
+          <a:noFill/>
+        </p:spPr>
+        <p:txBody>
+          <a:bodyPr wrap="square">
+            <a:spAutoFit/>
+          </a:bodyPr>
+          <a:lstStyle/>
+          <a:p>
+            <a:pPr algn="ctr"/>
+            <a:r>
+              <a:rPr sz="1300" b="1">
                 <a:solidFill>
                   <a:srgbClr val="FFFFFF"/>
                 </a:solidFill>
                 <a:latin typeface="Meiryo"/>
               </a:rPr>
-              <a:t>低強度・下半身</a:t>
+              <a:t>高強度・下半身</a:t>
             </a:r>
           </a:p>
         </p:txBody>
@@ -20713,8 +20756,8 @@
         </p:nvSpPr>
         <p:spPr>
           <a:xfrm>
-            <a:off x="7315200" y="1874519"/>
-            <a:ext cx="2103120" cy="502920"/>
+            <a:off x="9052560" y="1874519"/>
+            <a:ext cx="2651760" cy="502920"/>
           </a:xfrm>
           <a:prstGeom prst="rect">
             <a:avLst/>
@@ -20758,8 +20801,8 @@
         </p:nvSpPr>
         <p:spPr>
           <a:xfrm>
-            <a:off x="7360920" y="1920240"/>
-            <a:ext cx="2011680" cy="411480"/>
+            <a:off x="9098280" y="1920240"/>
+            <a:ext cx="2560320" cy="411480"/>
           </a:xfrm>
           <a:prstGeom prst="rect">
             <a:avLst/>
@@ -20780,7 +20823,7 @@
                 </a:solidFill>
                 <a:latin typeface="Meiryo"/>
               </a:rPr>
-              <a:t>木曜日</a:t>
+              <a:t>金曜日</a:t>
             </a:r>
           </a:p>
         </p:txBody>
@@ -20793,8 +20836,8 @@
         </p:nvSpPr>
         <p:spPr>
           <a:xfrm>
-            <a:off x="7315200" y="2514600"/>
-            <a:ext cx="2103120" cy="320040"/>
+            <a:off x="9052560" y="2514600"/>
+            <a:ext cx="2651760" cy="320040"/>
           </a:xfrm>
           <a:prstGeom prst="rect">
             <a:avLst/>
@@ -20838,8 +20881,8 @@
         </p:nvSpPr>
         <p:spPr>
           <a:xfrm>
-            <a:off x="7360920" y="2542032"/>
-            <a:ext cx="2011680" cy="274320"/>
+            <a:off x="9098280" y="2542032"/>
+            <a:ext cx="2560320" cy="274320"/>
           </a:xfrm>
           <a:prstGeom prst="rect">
             <a:avLst/>
@@ -20873,14 +20916,14 @@
         </p:nvSpPr>
         <p:spPr>
           <a:xfrm>
-            <a:off x="7315200" y="2880360"/>
-            <a:ext cx="2103120" cy="731520"/>
-          </a:xfrm>
-          <a:prstGeom prst="rect">
-            <a:avLst/>
-          </a:prstGeom>
-          <a:solidFill>
-            <a:srgbClr val="7F8C8D"/>
+            <a:off x="9052560" y="2880360"/>
+            <a:ext cx="2651760" cy="731520"/>
+          </a:xfrm>
+          <a:prstGeom prst="rect">
+            <a:avLst/>
+          </a:prstGeom>
+          <a:solidFill>
+            <a:srgbClr val="E74C3C"/>
           </a:solidFill>
           <a:ln>
             <a:solidFill>
@@ -20918,29 +20961,29 @@
         </p:nvSpPr>
         <p:spPr>
           <a:xfrm>
-            <a:off x="7360920" y="2926080"/>
-            <a:ext cx="2011680" cy="594360"/>
-          </a:xfrm>
-          <a:prstGeom prst="rect">
-            <a:avLst/>
-          </a:prstGeom>
-          <a:noFill/>
-        </p:spPr>
-        <p:txBody>
-          <a:bodyPr wrap="square">
-            <a:spAutoFit/>
-          </a:bodyPr>
-          <a:lstStyle/>
-          <a:p>
-            <a:pPr algn="ctr"/>
-            <a:r>
-              <a:rPr sz="1200" b="1">
+            <a:off x="9098280" y="2926080"/>
+            <a:ext cx="2560320" cy="594360"/>
+          </a:xfrm>
+          <a:prstGeom prst="rect">
+            <a:avLst/>
+          </a:prstGeom>
+          <a:noFill/>
+        </p:spPr>
+        <p:txBody>
+          <a:bodyPr wrap="square">
+            <a:spAutoFit/>
+          </a:bodyPr>
+          <a:lstStyle/>
+          <a:p>
+            <a:pPr algn="ctr"/>
+            <a:r>
+              <a:rPr sz="1300" b="1">
                 <a:solidFill>
                   <a:srgbClr val="FFFFFF"/>
                 </a:solidFill>
                 <a:latin typeface="Meiryo"/>
               </a:rPr>
-              <a:t>休息</a:t>
+              <a:t>高強度・下半身</a:t>
             </a:r>
           </a:p>
         </p:txBody>
@@ -20953,14 +20996,14 @@
         </p:nvSpPr>
         <p:spPr>
           <a:xfrm>
-            <a:off x="7315200" y="3749039"/>
-            <a:ext cx="2103120" cy="320040"/>
-          </a:xfrm>
-          <a:prstGeom prst="rect">
-            <a:avLst/>
-          </a:prstGeom>
-          <a:solidFill>
-            <a:srgbClr val="27AE60"/>
+            <a:off x="9052560" y="3749039"/>
+            <a:ext cx="2651760" cy="320040"/>
+          </a:xfrm>
+          <a:prstGeom prst="rect">
+            <a:avLst/>
+          </a:prstGeom>
+          <a:solidFill>
+            <a:srgbClr val="1F5C8B"/>
           </a:solidFill>
           <a:ln>
             <a:solidFill>
@@ -20998,8 +21041,8 @@
         </p:nvSpPr>
         <p:spPr>
           <a:xfrm>
-            <a:off x="7360920" y="3776472"/>
-            <a:ext cx="2011680" cy="274320"/>
+            <a:off x="9098280" y="3776472"/>
+            <a:ext cx="2560320" cy="274320"/>
           </a:xfrm>
           <a:prstGeom prst="rect">
             <a:avLst/>
@@ -21033,14 +21076,14 @@
         </p:nvSpPr>
         <p:spPr>
           <a:xfrm>
-            <a:off x="7315200" y="4114800"/>
-            <a:ext cx="2103120" cy="731520"/>
-          </a:xfrm>
-          <a:prstGeom prst="rect">
-            <a:avLst/>
-          </a:prstGeom>
-          <a:solidFill>
-            <a:srgbClr val="7F8C8D"/>
+            <a:off x="9052560" y="4114800"/>
+            <a:ext cx="2651760" cy="731520"/>
+          </a:xfrm>
+          <a:prstGeom prst="rect">
+            <a:avLst/>
+          </a:prstGeom>
+          <a:solidFill>
+            <a:srgbClr val="27AE60"/>
           </a:solidFill>
           <a:ln>
             <a:solidFill>
@@ -21078,29 +21121,29 @@
         </p:nvSpPr>
         <p:spPr>
           <a:xfrm>
-            <a:off x="7360920" y="4160520"/>
-            <a:ext cx="2011680" cy="594360"/>
-          </a:xfrm>
-          <a:prstGeom prst="rect">
-            <a:avLst/>
-          </a:prstGeom>
-          <a:noFill/>
-        </p:spPr>
-        <p:txBody>
-          <a:bodyPr wrap="square">
-            <a:spAutoFit/>
-          </a:bodyPr>
-          <a:lstStyle/>
-          <a:p>
-            <a:pPr algn="ctr"/>
-            <a:r>
-              <a:rPr sz="1200" b="1">
+            <a:off x="9098280" y="4160520"/>
+            <a:ext cx="2560320" cy="594360"/>
+          </a:xfrm>
+          <a:prstGeom prst="rect">
+            <a:avLst/>
+          </a:prstGeom>
+          <a:noFill/>
+        </p:spPr>
+        <p:txBody>
+          <a:bodyPr wrap="square">
+            <a:spAutoFit/>
+          </a:bodyPr>
+          <a:lstStyle/>
+          <a:p>
+            <a:pPr algn="ctr"/>
+            <a:r>
+              <a:rPr sz="1300" b="1">
                 <a:solidFill>
                   <a:srgbClr val="FFFFFF"/>
                 </a:solidFill>
                 <a:latin typeface="Meiryo"/>
               </a:rPr>
-              <a:t>休息</a:t>
+              <a:t>低強度・上半身</a:t>
             </a:r>
           </a:p>
         </p:txBody>
@@ -21113,14 +21156,14 @@
         </p:nvSpPr>
         <p:spPr>
           <a:xfrm>
-            <a:off x="9601200" y="1874519"/>
-            <a:ext cx="2103120" cy="502920"/>
-          </a:xfrm>
-          <a:prstGeom prst="rect">
-            <a:avLst/>
-          </a:prstGeom>
-          <a:solidFill>
-            <a:srgbClr val="1A3A5C"/>
+            <a:off x="274320" y="5029200"/>
+            <a:ext cx="11640312" cy="1463040"/>
+          </a:xfrm>
+          <a:prstGeom prst="rect">
+            <a:avLst/>
+          </a:prstGeom>
+          <a:solidFill>
+            <a:srgbClr val="EBF5FB"/>
           </a:solidFill>
           <a:ln>
             <a:solidFill>
@@ -21158,408 +21201,8 @@
         </p:nvSpPr>
         <p:spPr>
           <a:xfrm>
-            <a:off x="9646920" y="1920240"/>
-            <a:ext cx="2011680" cy="411480"/>
-          </a:xfrm>
-          <a:prstGeom prst="rect">
-            <a:avLst/>
-          </a:prstGeom>
-          <a:noFill/>
-        </p:spPr>
-        <p:txBody>
-          <a:bodyPr wrap="square">
-            <a:spAutoFit/>
-          </a:bodyPr>
-          <a:lstStyle/>
-          <a:p>
-            <a:pPr algn="ctr"/>
-            <a:r>
-              <a:rPr sz="1400" b="1">
-                <a:solidFill>
-                  <a:srgbClr val="FFFFFF"/>
-                </a:solidFill>
-                <a:latin typeface="Meiryo"/>
-              </a:rPr>
-              <a:t>金曜日</a:t>
-            </a:r>
-          </a:p>
-        </p:txBody>
-      </p:sp>
-      <p:sp>
-        <p:nvSpPr>
-          <p:cNvPr id="52" name="Rectangle 51"/>
-          <p:cNvSpPr/>
-          <p:nvPr/>
-        </p:nvSpPr>
-        <p:spPr>
-          <a:xfrm>
-            <a:off x="9601200" y="2514600"/>
-            <a:ext cx="2103120" cy="320040"/>
-          </a:xfrm>
-          <a:prstGeom prst="rect">
-            <a:avLst/>
-          </a:prstGeom>
-          <a:solidFill>
-            <a:srgbClr val="2E86C1"/>
-          </a:solidFill>
-          <a:ln>
-            <a:solidFill>
-              <a:srgbClr val="FFFFFF"/>
-            </a:solidFill>
-          </a:ln>
-        </p:spPr>
-        <p:style>
-          <a:lnRef idx="1">
-            <a:schemeClr val="accent1"/>
-          </a:lnRef>
-          <a:fillRef idx="3">
-            <a:schemeClr val="accent1"/>
-          </a:fillRef>
-          <a:effectRef idx="2">
-            <a:schemeClr val="accent1"/>
-          </a:effectRef>
-          <a:fontRef idx="minor">
-            <a:schemeClr val="lt1"/>
-          </a:fontRef>
-        </p:style>
-        <p:txBody>
-          <a:bodyPr rtlCol="0" anchor="ctr"/>
-          <a:lstStyle/>
-          <a:p>
-            <a:pPr algn="ctr"/>
-          </a:p>
-        </p:txBody>
-      </p:sp>
-      <p:sp>
-        <p:nvSpPr>
-          <p:cNvPr id="53" name="TextBox 52"/>
-          <p:cNvSpPr txBox="1"/>
-          <p:nvPr/>
-        </p:nvSpPr>
-        <p:spPr>
-          <a:xfrm>
-            <a:off x="9646920" y="2542032"/>
-            <a:ext cx="2011680" cy="274320"/>
-          </a:xfrm>
-          <a:prstGeom prst="rect">
-            <a:avLst/>
-          </a:prstGeom>
-          <a:noFill/>
-        </p:spPr>
-        <p:txBody>
-          <a:bodyPr wrap="square">
-            <a:spAutoFit/>
-          </a:bodyPr>
-          <a:lstStyle/>
-          <a:p>
-            <a:pPr algn="ctr"/>
-            <a:r>
-              <a:rPr sz="1000" b="1">
-                <a:solidFill>
-                  <a:srgbClr val="FFFFFF"/>
-                </a:solidFill>
-                <a:latin typeface="Meiryo"/>
-              </a:rPr>
-              <a:t>レジスタンス</a:t>
-            </a:r>
-          </a:p>
-        </p:txBody>
-      </p:sp>
-      <p:sp>
-        <p:nvSpPr>
-          <p:cNvPr id="54" name="Rectangle 53"/>
-          <p:cNvSpPr/>
-          <p:nvPr/>
-        </p:nvSpPr>
-        <p:spPr>
-          <a:xfrm>
-            <a:off x="9601200" y="2880360"/>
-            <a:ext cx="2103120" cy="731520"/>
-          </a:xfrm>
-          <a:prstGeom prst="rect">
-            <a:avLst/>
-          </a:prstGeom>
-          <a:solidFill>
-            <a:srgbClr val="E74C3C"/>
-          </a:solidFill>
-          <a:ln>
-            <a:solidFill>
-              <a:srgbClr val="FFFFFF"/>
-            </a:solidFill>
-          </a:ln>
-        </p:spPr>
-        <p:style>
-          <a:lnRef idx="1">
-            <a:schemeClr val="accent1"/>
-          </a:lnRef>
-          <a:fillRef idx="3">
-            <a:schemeClr val="accent1"/>
-          </a:fillRef>
-          <a:effectRef idx="2">
-            <a:schemeClr val="accent1"/>
-          </a:effectRef>
-          <a:fontRef idx="minor">
-            <a:schemeClr val="lt1"/>
-          </a:fontRef>
-        </p:style>
-        <p:txBody>
-          <a:bodyPr rtlCol="0" anchor="ctr"/>
-          <a:lstStyle/>
-          <a:p>
-            <a:pPr algn="ctr"/>
-          </a:p>
-        </p:txBody>
-      </p:sp>
-      <p:sp>
-        <p:nvSpPr>
-          <p:cNvPr id="55" name="TextBox 54"/>
-          <p:cNvSpPr txBox="1"/>
-          <p:nvPr/>
-        </p:nvSpPr>
-        <p:spPr>
-          <a:xfrm>
-            <a:off x="9646920" y="2926080"/>
-            <a:ext cx="2011680" cy="594360"/>
-          </a:xfrm>
-          <a:prstGeom prst="rect">
-            <a:avLst/>
-          </a:prstGeom>
-          <a:noFill/>
-        </p:spPr>
-        <p:txBody>
-          <a:bodyPr wrap="square">
-            <a:spAutoFit/>
-          </a:bodyPr>
-          <a:lstStyle/>
-          <a:p>
-            <a:pPr algn="ctr"/>
-            <a:r>
-              <a:rPr sz="1200" b="1">
-                <a:solidFill>
-                  <a:srgbClr val="FFFFFF"/>
-                </a:solidFill>
-                <a:latin typeface="Meiryo"/>
-              </a:rPr>
-              <a:t>高強度・下半身</a:t>
-            </a:r>
-          </a:p>
-        </p:txBody>
-      </p:sp>
-      <p:sp>
-        <p:nvSpPr>
-          <p:cNvPr id="56" name="Rectangle 55"/>
-          <p:cNvSpPr/>
-          <p:nvPr/>
-        </p:nvSpPr>
-        <p:spPr>
-          <a:xfrm>
-            <a:off x="9601200" y="3749039"/>
-            <a:ext cx="2103120" cy="320040"/>
-          </a:xfrm>
-          <a:prstGeom prst="rect">
-            <a:avLst/>
-          </a:prstGeom>
-          <a:solidFill>
-            <a:srgbClr val="27AE60"/>
-          </a:solidFill>
-          <a:ln>
-            <a:solidFill>
-              <a:srgbClr val="FFFFFF"/>
-            </a:solidFill>
-          </a:ln>
-        </p:spPr>
-        <p:style>
-          <a:lnRef idx="1">
-            <a:schemeClr val="accent1"/>
-          </a:lnRef>
-          <a:fillRef idx="3">
-            <a:schemeClr val="accent1"/>
-          </a:fillRef>
-          <a:effectRef idx="2">
-            <a:schemeClr val="accent1"/>
-          </a:effectRef>
-          <a:fontRef idx="minor">
-            <a:schemeClr val="lt1"/>
-          </a:fontRef>
-        </p:style>
-        <p:txBody>
-          <a:bodyPr rtlCol="0" anchor="ctr"/>
-          <a:lstStyle/>
-          <a:p>
-            <a:pPr algn="ctr"/>
-          </a:p>
-        </p:txBody>
-      </p:sp>
-      <p:sp>
-        <p:nvSpPr>
-          <p:cNvPr id="57" name="TextBox 56"/>
-          <p:cNvSpPr txBox="1"/>
-          <p:nvPr/>
-        </p:nvSpPr>
-        <p:spPr>
-          <a:xfrm>
-            <a:off x="9646920" y="3776472"/>
-            <a:ext cx="2011680" cy="274320"/>
-          </a:xfrm>
-          <a:prstGeom prst="rect">
-            <a:avLst/>
-          </a:prstGeom>
-          <a:noFill/>
-        </p:spPr>
-        <p:txBody>
-          <a:bodyPr wrap="square">
-            <a:spAutoFit/>
-          </a:bodyPr>
-          <a:lstStyle/>
-          <a:p>
-            <a:pPr algn="ctr"/>
-            <a:r>
-              <a:rPr sz="1000" b="1">
-                <a:solidFill>
-                  <a:srgbClr val="FFFFFF"/>
-                </a:solidFill>
-                <a:latin typeface="Meiryo"/>
-              </a:rPr>
-              <a:t>プライオメトリクス</a:t>
-            </a:r>
-          </a:p>
-        </p:txBody>
-      </p:sp>
-      <p:sp>
-        <p:nvSpPr>
-          <p:cNvPr id="58" name="Rectangle 57"/>
-          <p:cNvSpPr/>
-          <p:nvPr/>
-        </p:nvSpPr>
-        <p:spPr>
-          <a:xfrm>
-            <a:off x="9601200" y="4114800"/>
-            <a:ext cx="2103120" cy="731520"/>
-          </a:xfrm>
-          <a:prstGeom prst="rect">
-            <a:avLst/>
-          </a:prstGeom>
-          <a:solidFill>
-            <a:srgbClr val="27AE60"/>
-          </a:solidFill>
-          <a:ln>
-            <a:solidFill>
-              <a:srgbClr val="FFFFFF"/>
-            </a:solidFill>
-          </a:ln>
-        </p:spPr>
-        <p:style>
-          <a:lnRef idx="1">
-            <a:schemeClr val="accent1"/>
-          </a:lnRef>
-          <a:fillRef idx="3">
-            <a:schemeClr val="accent1"/>
-          </a:fillRef>
-          <a:effectRef idx="2">
-            <a:schemeClr val="accent1"/>
-          </a:effectRef>
-          <a:fontRef idx="minor">
-            <a:schemeClr val="lt1"/>
-          </a:fontRef>
-        </p:style>
-        <p:txBody>
-          <a:bodyPr rtlCol="0" anchor="ctr"/>
-          <a:lstStyle/>
-          <a:p>
-            <a:pPr algn="ctr"/>
-          </a:p>
-        </p:txBody>
-      </p:sp>
-      <p:sp>
-        <p:nvSpPr>
-          <p:cNvPr id="59" name="TextBox 58"/>
-          <p:cNvSpPr txBox="1"/>
-          <p:nvPr/>
-        </p:nvSpPr>
-        <p:spPr>
-          <a:xfrm>
-            <a:off x="9646920" y="4160520"/>
-            <a:ext cx="2011680" cy="594360"/>
-          </a:xfrm>
-          <a:prstGeom prst="rect">
-            <a:avLst/>
-          </a:prstGeom>
-          <a:noFill/>
-        </p:spPr>
-        <p:txBody>
-          <a:bodyPr wrap="square">
-            <a:spAutoFit/>
-          </a:bodyPr>
-          <a:lstStyle/>
-          <a:p>
-            <a:pPr algn="ctr"/>
-            <a:r>
-              <a:rPr sz="1200" b="1">
-                <a:solidFill>
-                  <a:srgbClr val="FFFFFF"/>
-                </a:solidFill>
-                <a:latin typeface="Meiryo"/>
-              </a:rPr>
-              <a:t>低強度・上半身</a:t>
-            </a:r>
-          </a:p>
-        </p:txBody>
-      </p:sp>
-      <p:sp>
-        <p:nvSpPr>
-          <p:cNvPr id="60" name="Rectangle 59"/>
-          <p:cNvSpPr/>
-          <p:nvPr/>
-        </p:nvSpPr>
-        <p:spPr>
-          <a:xfrm>
-            <a:off x="274320" y="5074920"/>
-            <a:ext cx="11640312" cy="1234440"/>
-          </a:xfrm>
-          <a:prstGeom prst="rect">
-            <a:avLst/>
-          </a:prstGeom>
-          <a:solidFill>
-            <a:srgbClr val="EBF5FB"/>
-          </a:solidFill>
-          <a:ln>
-            <a:solidFill>
-              <a:srgbClr val="FFFFFF"/>
-            </a:solidFill>
-          </a:ln>
-        </p:spPr>
-        <p:style>
-          <a:lnRef idx="1">
-            <a:schemeClr val="accent1"/>
-          </a:lnRef>
-          <a:fillRef idx="3">
-            <a:schemeClr val="accent1"/>
-          </a:fillRef>
-          <a:effectRef idx="2">
-            <a:schemeClr val="accent1"/>
-          </a:effectRef>
-          <a:fontRef idx="minor">
-            <a:schemeClr val="lt1"/>
-          </a:fontRef>
-        </p:style>
-        <p:txBody>
-          <a:bodyPr rtlCol="0" anchor="ctr"/>
-          <a:lstStyle/>
-          <a:p>
-            <a:pPr algn="ctr"/>
-          </a:p>
-        </p:txBody>
-      </p:sp>
-      <p:sp>
-        <p:nvSpPr>
-          <p:cNvPr id="61" name="TextBox 60"/>
-          <p:cNvSpPr txBox="1"/>
-          <p:nvPr/>
-        </p:nvSpPr>
-        <p:spPr>
-          <a:xfrm>
-            <a:off x="457200" y="5166360"/>
-            <a:ext cx="11247120" cy="1097280"/>
+            <a:off x="457200" y="5120640"/>
+            <a:ext cx="11247120" cy="1280160"/>
           </a:xfrm>
           <a:prstGeom prst="rect">
             <a:avLst/>
@@ -21580,8 +21223,9 @@
                 </a:solidFill>
                 <a:latin typeface="Meiryo"/>
               </a:rPr>
-              <a:t>● 同一ワークアウトでの組み合わせは、プライオメトリクス → レジスタンストレーニングの順で行う
-● 同一筋群のレジスタンスとプライオメトリクスを組み合わせると高いパフォーマンス改善効果が得られる</a:t>
+              <a:t>● 下半身のレジスタンス × 上半身のプライオ、上半身のレジスタンス × 下半身のプライオで組み合わせる
+● 高重量のレジスタンスとプライオを同じ日に行うのは通常すすめられない（例外：コンプレックストレーニング）
+● プライオメトリクスは有酸素性持久力トレーニングの前に行う</a:t>
             </a:r>
           </a:p>
         </p:txBody>
@@ -21884,7 +21528,7 @@
                 </a:solidFill>
                 <a:latin typeface="Meiryo"/>
               </a:rPr>
-              <a:t>プライオメトリックトレーニングの目的：主動筋に適切な負荷をかけながら最大の力を発揮する能力を高める</a:t>
+              <a:t>プライオメトリックトレーニングの目的：主働筋に過負荷をかけ、素早く力を発揮する能力を高める</a:t>
             </a:r>
           </a:p>
         </p:txBody>
@@ -22079,7 +21723,7 @@
                 </a:solidFill>
                 <a:latin typeface="Meiryo"/>
               </a:rPr>
-              <a:t>量より質。動作の崩れを見逃さない</a:t>
+              <a:t>とくに着地。肩・膝がつま先の上、膝が内に入らない</a:t>
             </a:r>
           </a:p>
         </p:txBody>
@@ -22274,7 +21918,7 @@
                 </a:solidFill>
                 <a:latin typeface="Meiryo"/>
               </a:rPr>
-              <a:t>競技・ポジション・体力レベルの分析が必須</a:t>
+              <a:t>競技・ポジション・トレーニング状態を評価</a:t>
             </a:r>
           </a:p>
         </p:txBody>
@@ -22434,7 +22078,7 @@
                 </a:solidFill>
                 <a:latin typeface="Meiryo"/>
               </a:rPr>
-              <a:t>段階的に強度を上げる</a:t>
+              <a:t>漸進的に負荷を上げる</a:t>
             </a:r>
           </a:p>
         </p:txBody>
@@ -22469,7 +22113,7 @@
                 </a:solidFill>
                 <a:latin typeface="Meiryo"/>
               </a:rPr>
-              <a:t>漸進性の原則に従いプログラムを組む</a:t>
+              <a:t>強度を上げたら量（接地回数）を減らす</a:t>
             </a:r>
           </a:p>
         </p:txBody>
@@ -22629,7 +22273,7 @@
                 </a:solidFill>
                 <a:latin typeface="Meiryo"/>
               </a:rPr>
-              <a:t>週2〜3回・48時間の回復</a:t>
+              <a:t>十分な回復をとる</a:t>
             </a:r>
           </a:p>
         </p:txBody>
@@ -22664,7 +22308,7 @@
                 </a:solidFill>
                 <a:latin typeface="Meiryo"/>
               </a:rPr>
-              <a:t>過剰トレーニングを避け十分な回復を確保</a:t>
+              <a:t>セッション間48〜72時間、運動‐休息比1:5〜1:10</a:t>
             </a:r>
           </a:p>
         </p:txBody>
@@ -22824,7 +22468,7 @@
                 </a:solidFill>
                 <a:latin typeface="Meiryo"/>
               </a:rPr>
-              <a:t>ウォームアップを必ず実施</a:t>
+              <a:t>ウォームアップを必ず行う</a:t>
             </a:r>
           </a:p>
         </p:txBody>
@@ -22859,7 +22503,7 @@
                 </a:solidFill>
                 <a:latin typeface="Meiryo"/>
               </a:rPr>
-              <a:t>マーチング・ジョギング・スキップ等</a:t>
+              <a:t>マーチング・ジョギング・スキップ・フットワーク・ランジ</a:t>
             </a:r>
           </a:p>
         </p:txBody>
@@ -23054,7 +22698,7 @@
                 </a:solidFill>
                 <a:latin typeface="Meiryo"/>
               </a:rPr>
-              <a:t>床面・天井高・ボックス高・シューズ</a:t>
+              <a:t>着地面・天井高・ボックス・シューズ・監視</a:t>
             </a:r>
           </a:p>
         </p:txBody>
@@ -23214,7 +22858,7 @@
                 </a:solidFill>
                 <a:latin typeface="Meiryo"/>
               </a:rPr>
-              <a:t>対象者の特性に合わせる</a:t>
+              <a:t>対象者に合わせる</a:t>
             </a:r>
           </a:p>
         </p:txBody>
@@ -23249,7 +22893,7 @@
                 </a:solidFill>
                 <a:latin typeface="Meiryo"/>
               </a:rPr>
-              <a:t>年齢・経験・体力に応じた個別プログラム</a:t>
+              <a:t>子ども・成人・マスターズで強度・量・回復を調整</a:t>
             </a:r>
           </a:p>
         </p:txBody>
@@ -23556,7 +23200,7 @@
                 </a:solidFill>
                 <a:latin typeface="Meiryo"/>
               </a:rPr>
-              <a:t>  1.  プライオメトリクスの生理学を説明することができる</a:t>
+              <a:t>  1.  プライオメトリクスの仕組み（力学的・神経生理学的なしくみ）を説明できる</a:t>
             </a:r>
           </a:p>
           <a:p>
@@ -23572,7 +23216,7 @@
                 </a:solidFill>
                 <a:latin typeface="Meiryo"/>
               </a:rPr>
-              <a:t>  2.  ストレッチ・ショートニングサイクル（SSC）の各局面を区別することができる</a:t>
+              <a:t>  2.  ストレッチ・ショートニングサイクル（SSC）の3つの局面を区別できる</a:t>
             </a:r>
           </a:p>
           <a:p>
@@ -23588,7 +23232,7 @@
                 </a:solidFill>
                 <a:latin typeface="Meiryo"/>
               </a:rPr>
-              <a:t>  3.  プライオメトリクストレーニングプログラムの構成要素を識別することができる</a:t>
+              <a:t>  3.  プライオメトリックトレーニングのプログラムを構成する要素を挙げられる</a:t>
             </a:r>
           </a:p>
           <a:p>
@@ -23604,7 +23248,7 @@
                 </a:solidFill>
                 <a:latin typeface="Meiryo"/>
               </a:rPr>
-              <a:t>  4.  安全で適切なプライオメトリックトレーニングプログラムをデザインすることができる</a:t>
+              <a:t>  4.  安全で効果的なプライオメトリックトレーニングのプログラムをデザインできる</a:t>
             </a:r>
           </a:p>
           <a:p>
@@ -23620,7 +23264,7 @@
                 </a:solidFill>
                 <a:latin typeface="Meiryo"/>
               </a:rPr>
-              <a:t>  5.  下半身・上半身のプライオメトリックエクササイズを正しく実施する方法を支援できる</a:t>
+              <a:t>  5.  下半身・上半身のプライオメトリックエクササイズを正しく行えるよう指導できる</a:t>
             </a:r>
           </a:p>
         </p:txBody>
@@ -23968,7 +23612,7 @@
                 </a:solidFill>
                 <a:latin typeface="Meiryo"/>
               </a:rPr>
-              <a:t>Q1  SSCの第1段階は何か？</a:t>
+              <a:t>Q1  SSCで最も重要とされる局面は？</a:t>
             </a:r>
           </a:p>
         </p:txBody>
@@ -24048,7 +23692,7 @@
                 </a:solidFill>
                 <a:latin typeface="Meiryo"/>
               </a:rPr>
-              <a:t>答え：伸張性局面（主動筋が引き伸ばされエネルギーを蓄積）</a:t>
+              <a:t>答え：償却局面（できるだけ短くする）</a:t>
             </a:r>
           </a:p>
         </p:txBody>
@@ -24173,7 +23817,7 @@
                 </a:solidFill>
                 <a:latin typeface="Meiryo"/>
               </a:rPr>
-              <a:t>Q2  プライオメトリクスで弾性エネルギーを主に蓄える要素は？</a:t>
+              <a:t>Q2  伸張反射を引き起こす受容器は？</a:t>
             </a:r>
           </a:p>
         </p:txBody>
@@ -24253,7 +23897,7 @@
                 </a:solidFill>
                 <a:latin typeface="Meiryo"/>
               </a:rPr>
-              <a:t>答え：SEC（直列弾性要素）</a:t>
+              <a:t>答え：筋紡錘（ゴルジ腱器官ではない）</a:t>
             </a:r>
           </a:p>
         </p:txBody>
@@ -24378,7 +24022,7 @@
                 </a:solidFill>
                 <a:latin typeface="Meiryo"/>
               </a:rPr>
-              <a:t>Q3  初心者の1セッション当たりの回数は？</a:t>
+              <a:t>Q3  初心者の開始時の量（接地回数）は？</a:t>
             </a:r>
           </a:p>
         </p:txBody>
@@ -24458,7 +24102,7 @@
                 </a:solidFill>
                 <a:latin typeface="Meiryo"/>
               </a:rPr>
-              <a:t>答え：80〜100回</a:t>
+              <a:t>答え：1セッション 80〜100</a:t>
             </a:r>
           </a:p>
         </p:txBody>
@@ -24583,7 +24227,7 @@
                 </a:solidFill>
                 <a:latin typeface="Meiryo"/>
               </a:rPr>
-              <a:t>Q4  デプスジャンプのボックス最大高さは？</a:t>
+              <a:t>Q4  デプスジャンプの高さの一般的な基準は？</a:t>
             </a:r>
           </a:p>
         </p:txBody>
@@ -24663,7 +24307,7 @@
                 </a:solidFill>
                 <a:latin typeface="Meiryo"/>
               </a:rPr>
-              <a:t>答え：1.2m（48インチ）</a:t>
+              <a:t>答え：76〜81cm（推奨41〜107cm）</a:t>
             </a:r>
           </a:p>
         </p:txBody>
@@ -24788,7 +24432,7 @@
                 </a:solidFill>
                 <a:latin typeface="Meiryo"/>
               </a:rPr>
-              <a:t>Q5  青年期に推奨されないドリルは？</a:t>
+              <a:t>Q5  運動‐休息比として適切なのは？</a:t>
             </a:r>
           </a:p>
         </p:txBody>
@@ -24868,7 +24512,7 @@
                 </a:solidFill>
                 <a:latin typeface="Meiryo"/>
               </a:rPr>
-              <a:t>答え：デプスジャンプや高強度の下半身プライオメトリクス</a:t>
+              <a:t>答え：1:5〜1:10</a:t>
             </a:r>
           </a:p>
         </p:txBody>
@@ -25200,13 +24844,13 @@
           <a:p>
             <a:pPr algn="l"/>
             <a:r>
-              <a:rPr sz="1900" b="1">
+              <a:rPr sz="1700" b="1">
                 <a:solidFill>
                   <a:srgbClr val="FFFFFF"/>
                 </a:solidFill>
                 <a:latin typeface="Meiryo"/>
               </a:rPr>
-              <a:t>筋肉が素早く伸ばされた直後に収縮することで最大の力を発揮するトレーニング方法</a:t>
+              <a:t>筋ができるだけ短い時間で最大の力を発揮できるようにするための運動。反動動作（SSC）を使った素早くパワフルな動き</a:t>
             </a:r>
           </a:p>
         </p:txBody>
@@ -25321,10 +24965,9 @@
                 </a:solidFill>
                 <a:latin typeface="Meiryo"/>
               </a:rPr>
-              <a:t>プリオ（plio）
-= より多く
-メトリック（metric）
-= 測る</a:t>
+              <a:t>ギリシャ語で「長さが伸びること」
+plio ＝ さらに
+metric ＝ 長さ</a:t>
             </a:r>
           </a:p>
         </p:txBody>
@@ -25439,8 +25082,8 @@
                 </a:solidFill>
                 <a:latin typeface="Meiryo"/>
               </a:rPr>
-              <a:t>SSC（ストレッチ・ショートニングサイクル）を活用して、
-筋の反応速度とパワー発揮能力を向上させる</a:t>
+              <a:t>筋・腱の弾性と伸張反射の両方を利用して、
+続く動作のパワーを大きくする</a:t>
             </a:r>
           </a:p>
         </p:txBody>
@@ -25514,13 +25157,13 @@
           <a:p>
             <a:pPr algn="l"/>
             <a:r>
-              <a:rPr sz="1400" b="0">
+              <a:rPr sz="1300" b="0">
                 <a:solidFill>
                   <a:srgbClr val="1F5C8B"/>
                 </a:solidFill>
                 <a:latin typeface="Meiryo"/>
               </a:rPr>
-              <a:t>主な効果：  瞬発力向上　/　スポーツパフォーマンス向上　/　怪我予防　/　神経系の強化</a:t>
+              <a:t>期待できること：  パワー（力×スピード）の向上　/　ジャンプ力の向上　/　投球速度の向上（上半身）　/　持久系のランニング効率</a:t>
             </a:r>
           </a:p>
         </p:txBody>
@@ -25823,7 +25466,7 @@
                 </a:solidFill>
                 <a:latin typeface="Meiryo"/>
               </a:rPr>
-              <a:t>第1段階
+              <a:t>第Ⅰ局面
 伸張性局面</a:t>
             </a:r>
           </a:p>
@@ -25859,8 +25502,9 @@
                 </a:solidFill>
                 <a:latin typeface="Meiryo"/>
               </a:rPr>
-              <a:t>主動筋が引き伸ばされる
-弾性エネルギーを蓄積</a:t>
+              <a:t>主働筋が引き伸ばされる
+弾性エネルギーを蓄積
+筋紡錘が刺激される</a:t>
             </a:r>
           </a:p>
         </p:txBody>
@@ -25975,8 +25619,8 @@
                 </a:solidFill>
                 <a:latin typeface="Meiryo"/>
               </a:rPr>
-              <a:t>第2段階
-一般筋放電</a:t>
+              <a:t>第Ⅱ局面
+償却局面</a:t>
             </a:r>
           </a:p>
         </p:txBody>
@@ -26011,8 +25655,9 @@
                 </a:solidFill>
                 <a:latin typeface="Meiryo"/>
               </a:rPr>
-              <a:t>切り替えの瞬間
-（極めて短時間）</a:t>
+              <a:t>伸張から短縮への切り返し
+（Ⅰ・Ⅲの間の休止）
+脊髄で信号を中継</a:t>
             </a:r>
           </a:p>
         </p:txBody>
@@ -26127,7 +25772,7 @@
                 </a:solidFill>
                 <a:latin typeface="Meiryo"/>
               </a:rPr>
-              <a:t>第3段階
+              <a:t>第Ⅲ局面
 短縮性局面</a:t>
             </a:r>
           </a:p>
@@ -26163,9 +25808,9 @@
                 </a:solidFill>
                 <a:latin typeface="Meiryo"/>
               </a:rPr>
-              <a:t>筋肉が収縮して
-エネルギーを解放！
-パワー発揮</a:t>
+              <a:t>主働筋が短縮する
+弾性エネルギーを放出
+反射で筋活動が増幅</a:t>
             </a:r>
           </a:p>
         </p:txBody>
@@ -26245,7 +25890,7 @@
                 </a:solidFill>
                 <a:latin typeface="Meiryo"/>
               </a:rPr>
-              <a:t>ポイント：第1段階→第3段階への移行時間が短いほど、蓄えた弾性エネルギーをより多く利用できる</a:t>
+              <a:t>ポイント：最も重要なのは償却局面。短いほど、蓄えた弾性エネルギーと伸張反射を活かせる</a:t>
             </a:r>
           </a:p>
         </p:txBody>
@@ -26607,7 +26252,7 @@
         <p:spPr>
           <a:xfrm>
             <a:off x="457200" y="1920240"/>
-            <a:ext cx="5212080" cy="1920240"/>
+            <a:ext cx="5212080" cy="1417320"/>
           </a:xfrm>
           <a:prstGeom prst="rect">
             <a:avLst/>
@@ -26651,8 +26296,8 @@
         </p:nvSpPr>
         <p:spPr>
           <a:xfrm>
-            <a:off x="594360" y="2011680"/>
-            <a:ext cx="4846320" cy="457200"/>
+            <a:off x="594360" y="1993392"/>
+            <a:ext cx="4846320" cy="411480"/>
           </a:xfrm>
           <a:prstGeom prst="rect">
             <a:avLst/>
@@ -26667,7 +26312,7 @@
           <a:p>
             <a:pPr algn="l"/>
             <a:r>
-              <a:rPr sz="1600" b="1">
+              <a:rPr sz="1500" b="1">
                 <a:solidFill>
                   <a:srgbClr val="FFFFFF"/>
                 </a:solidFill>
@@ -26686,8 +26331,8 @@
         </p:nvSpPr>
         <p:spPr>
           <a:xfrm>
-            <a:off x="594360" y="2468880"/>
-            <a:ext cx="4846320" cy="1188720"/>
+            <a:off x="594360" y="2423160"/>
+            <a:ext cx="4937760" cy="868680"/>
           </a:xfrm>
           <a:prstGeom prst="rect">
             <a:avLst/>
@@ -26702,14 +26347,14 @@
           <a:p>
             <a:pPr algn="l"/>
             <a:r>
-              <a:rPr sz="1300" b="0">
+              <a:rPr sz="1200" b="0">
                 <a:solidFill>
                   <a:srgbClr val="FFFFFF"/>
                 </a:solidFill>
                 <a:latin typeface="Meiryo"/>
               </a:rPr>
-              <a:t>腱・腱膜に蓄えられる弾性エネルギー
-★ プライオメトリクスの主役</a:t>
+              <a:t>大部分は腱。伸ばされるとバネのように
+弾性エネルギーを蓄え、直後に放出 ★重要</a:t>
             </a:r>
           </a:p>
         </p:txBody>
@@ -26722,14 +26367,14 @@
         </p:nvSpPr>
         <p:spPr>
           <a:xfrm>
-            <a:off x="457200" y="4023360"/>
-            <a:ext cx="5212080" cy="1920240"/>
-          </a:xfrm>
-          <a:prstGeom prst="rect">
-            <a:avLst/>
-          </a:prstGeom>
-          <a:solidFill>
-            <a:srgbClr val="16A085"/>
+            <a:off x="457200" y="3474720"/>
+            <a:ext cx="5212080" cy="1417320"/>
+          </a:xfrm>
+          <a:prstGeom prst="rect">
+            <a:avLst/>
+          </a:prstGeom>
+          <a:solidFill>
+            <a:srgbClr val="5DADE2"/>
           </a:solidFill>
           <a:ln>
             <a:solidFill>
@@ -26767,8 +26412,8 @@
         </p:nvSpPr>
         <p:spPr>
           <a:xfrm>
-            <a:off x="594360" y="4114800"/>
-            <a:ext cx="4846320" cy="457200"/>
+            <a:off x="594360" y="3547872"/>
+            <a:ext cx="4846320" cy="411480"/>
           </a:xfrm>
           <a:prstGeom prst="rect">
             <a:avLst/>
@@ -26783,13 +26428,13 @@
           <a:p>
             <a:pPr algn="l"/>
             <a:r>
-              <a:rPr sz="1600" b="1">
+              <a:rPr sz="1500" b="1">
                 <a:solidFill>
                   <a:srgbClr val="FFFFFF"/>
                 </a:solidFill>
                 <a:latin typeface="Meiryo"/>
               </a:rPr>
-              <a:t>PEC　並列弾性要素</a:t>
+              <a:t>CC　収縮要素</a:t>
             </a:r>
           </a:p>
         </p:txBody>
@@ -26802,8 +26447,8 @@
         </p:nvSpPr>
         <p:spPr>
           <a:xfrm>
-            <a:off x="594360" y="4572000"/>
-            <a:ext cx="4846320" cy="1188720"/>
+            <a:off x="594360" y="3977639"/>
+            <a:ext cx="4937760" cy="868680"/>
           </a:xfrm>
           <a:prstGeom prst="rect">
             <a:avLst/>
@@ -26818,14 +26463,14 @@
           <a:p>
             <a:pPr algn="l"/>
             <a:r>
-              <a:rPr sz="1300" b="0">
+              <a:rPr sz="1200" b="0">
                 <a:solidFill>
                   <a:srgbClr val="FFFFFF"/>
                 </a:solidFill>
                 <a:latin typeface="Meiryo"/>
               </a:rPr>
-              <a:t>筋膜などの受動的な弾性
-補助的な役割</a:t>
+              <a:t>アクチン・ミオシン・クロスブリッジ
+短縮性筋活動で主に力を発揮</a:t>
             </a:r>
           </a:p>
         </p:txBody>
@@ -26838,14 +26483,14 @@
         </p:nvSpPr>
         <p:spPr>
           <a:xfrm>
-            <a:off x="6126480" y="1371600"/>
-            <a:ext cx="5788152" cy="5212080"/>
-          </a:xfrm>
-          <a:prstGeom prst="rect">
-            <a:avLst/>
-          </a:prstGeom>
-          <a:solidFill>
-            <a:srgbClr val="FFFFFF"/>
+            <a:off x="457200" y="5029200"/>
+            <a:ext cx="5212080" cy="1417320"/>
+          </a:xfrm>
+          <a:prstGeom prst="rect">
+            <a:avLst/>
+          </a:prstGeom>
+          <a:solidFill>
+            <a:srgbClr val="16A085"/>
           </a:solidFill>
           <a:ln>
             <a:solidFill>
@@ -26877,20 +26522,91 @@
       </p:sp>
       <p:sp>
         <p:nvSpPr>
-          <p:cNvPr id="17" name="Rectangle 16"/>
+          <p:cNvPr id="17" name="TextBox 16"/>
+          <p:cNvSpPr txBox="1"/>
+          <p:nvPr/>
+        </p:nvSpPr>
+        <p:spPr>
+          <a:xfrm>
+            <a:off x="594360" y="5102352"/>
+            <a:ext cx="4846320" cy="411480"/>
+          </a:xfrm>
+          <a:prstGeom prst="rect">
+            <a:avLst/>
+          </a:prstGeom>
+          <a:noFill/>
+        </p:spPr>
+        <p:txBody>
+          <a:bodyPr wrap="square">
+            <a:spAutoFit/>
+          </a:bodyPr>
+          <a:lstStyle/>
+          <a:p>
+            <a:pPr algn="l"/>
+            <a:r>
+              <a:rPr sz="1500" b="1">
+                <a:solidFill>
+                  <a:srgbClr val="FFFFFF"/>
+                </a:solidFill>
+                <a:latin typeface="Meiryo"/>
+              </a:rPr>
+              <a:t>PEC　並列弾性要素</a:t>
+            </a:r>
+          </a:p>
+        </p:txBody>
+      </p:sp>
+      <p:sp>
+        <p:nvSpPr>
+          <p:cNvPr id="18" name="TextBox 17"/>
+          <p:cNvSpPr txBox="1"/>
+          <p:nvPr/>
+        </p:nvSpPr>
+        <p:spPr>
+          <a:xfrm>
+            <a:off x="594360" y="5532120"/>
+            <a:ext cx="4937760" cy="868680"/>
+          </a:xfrm>
+          <a:prstGeom prst="rect">
+            <a:avLst/>
+          </a:prstGeom>
+          <a:noFill/>
+        </p:spPr>
+        <p:txBody>
+          <a:bodyPr wrap="square">
+            <a:spAutoFit/>
+          </a:bodyPr>
+          <a:lstStyle/>
+          <a:p>
+            <a:pPr algn="l"/>
+            <a:r>
+              <a:rPr sz="1200" b="0">
+                <a:solidFill>
+                  <a:srgbClr val="FFFFFF"/>
+                </a:solidFill>
+                <a:latin typeface="Meiryo"/>
+              </a:rPr>
+              <a:t>筋外膜・筋周膜・筋内膜・筋鞘
+刺激のない筋が伸ばされると受動的に力を発揮</a:t>
+            </a:r>
+          </a:p>
+        </p:txBody>
+      </p:sp>
+      <p:sp>
+        <p:nvSpPr>
+          <p:cNvPr id="19" name="Rectangle 18"/>
           <p:cNvSpPr/>
           <p:nvPr/>
         </p:nvSpPr>
         <p:spPr>
           <a:xfrm>
             <a:off x="6126480" y="1371600"/>
-            <a:ext cx="5788152" cy="411480"/>
-          </a:xfrm>
-          <a:prstGeom prst="rect">
-            <a:avLst/>
-          </a:prstGeom>
-          <a:solidFill>
-            <a:srgbClr val="8E44AD"/>
+            <a:ext cx="5788152" cy="5212080"/>
+          </a:xfrm>
+          <a:prstGeom prst="rect">
+            <a:avLst/>
+          </a:prstGeom>
+          <a:solidFill>
+            <a:srgbClr val="FFFFFF"/>
           </a:solidFill>
           <a:ln>
             <a:solidFill>
@@ -26922,55 +26638,20 @@
       </p:sp>
       <p:sp>
         <p:nvSpPr>
-          <p:cNvPr id="18" name="TextBox 17"/>
-          <p:cNvSpPr txBox="1"/>
-          <p:nvPr/>
-        </p:nvSpPr>
-        <p:spPr>
-          <a:xfrm>
-            <a:off x="6263640" y="1417320"/>
-            <a:ext cx="5486400" cy="347472"/>
-          </a:xfrm>
-          <a:prstGeom prst="rect">
-            <a:avLst/>
-          </a:prstGeom>
-          <a:noFill/>
-        </p:spPr>
-        <p:txBody>
-          <a:bodyPr wrap="square">
-            <a:spAutoFit/>
-          </a:bodyPr>
-          <a:lstStyle/>
-          <a:p>
-            <a:pPr algn="l"/>
-            <a:r>
-              <a:rPr sz="1300" b="1">
-                <a:solidFill>
-                  <a:srgbClr val="FFFFFF"/>
-                </a:solidFill>
-                <a:latin typeface="Meiryo"/>
-              </a:rPr>
-              <a:t>神経生理学的モデル（伸張反射）</a:t>
-            </a:r>
-          </a:p>
-        </p:txBody>
-      </p:sp>
-      <p:sp>
-        <p:nvSpPr>
-          <p:cNvPr id="19" name="Rectangle 18"/>
+          <p:cNvPr id="20" name="Rectangle 19"/>
           <p:cNvSpPr/>
           <p:nvPr/>
         </p:nvSpPr>
         <p:spPr>
           <a:xfrm>
-            <a:off x="6400800" y="1874519"/>
-            <a:ext cx="5212080" cy="868680"/>
-          </a:xfrm>
-          <a:prstGeom prst="rect">
-            <a:avLst/>
-          </a:prstGeom>
-          <a:solidFill>
-            <a:srgbClr val="2E86C1"/>
+            <a:off x="6126480" y="1371600"/>
+            <a:ext cx="5788152" cy="411480"/>
+          </a:xfrm>
+          <a:prstGeom prst="rect">
+            <a:avLst/>
+          </a:prstGeom>
+          <a:solidFill>
+            <a:srgbClr val="8E44AD"/>
           </a:solidFill>
           <a:ln>
             <a:solidFill>
@@ -27002,27 +26683,27 @@
       </p:sp>
       <p:sp>
         <p:nvSpPr>
-          <p:cNvPr id="20" name="TextBox 19"/>
-          <p:cNvSpPr txBox="1"/>
-          <p:nvPr/>
-        </p:nvSpPr>
-        <p:spPr>
-          <a:xfrm>
-            <a:off x="6446520" y="1947672"/>
-            <a:ext cx="5120640" cy="749808"/>
-          </a:xfrm>
-          <a:prstGeom prst="rect">
-            <a:avLst/>
-          </a:prstGeom>
-          <a:noFill/>
-        </p:spPr>
-        <p:txBody>
-          <a:bodyPr wrap="square">
-            <a:spAutoFit/>
-          </a:bodyPr>
-          <a:lstStyle/>
-          <a:p>
-            <a:pPr algn="ctr"/>
+          <p:cNvPr id="21" name="TextBox 20"/>
+          <p:cNvSpPr txBox="1"/>
+          <p:nvPr/>
+        </p:nvSpPr>
+        <p:spPr>
+          <a:xfrm>
+            <a:off x="6263640" y="1417320"/>
+            <a:ext cx="5486400" cy="347472"/>
+          </a:xfrm>
+          <a:prstGeom prst="rect">
+            <a:avLst/>
+          </a:prstGeom>
+          <a:noFill/>
+        </p:spPr>
+        <p:txBody>
+          <a:bodyPr wrap="square">
+            <a:spAutoFit/>
+          </a:bodyPr>
+          <a:lstStyle/>
+          <a:p>
+            <a:pPr algn="l"/>
             <a:r>
               <a:rPr sz="1300" b="1">
                 <a:solidFill>
@@ -27030,43 +26711,7 @@
                 </a:solidFill>
                 <a:latin typeface="Meiryo"/>
               </a:rPr>
-              <a:t>筋肉が急激に
-引き伸ばされる</a:t>
-            </a:r>
-          </a:p>
-        </p:txBody>
-      </p:sp>
-      <p:sp>
-        <p:nvSpPr>
-          <p:cNvPr id="21" name="TextBox 20"/>
-          <p:cNvSpPr txBox="1"/>
-          <p:nvPr/>
-        </p:nvSpPr>
-        <p:spPr>
-          <a:xfrm>
-            <a:off x="8549640" y="2697479"/>
-            <a:ext cx="548640" cy="274320"/>
-          </a:xfrm>
-          <a:prstGeom prst="rect">
-            <a:avLst/>
-          </a:prstGeom>
-          <a:noFill/>
-        </p:spPr>
-        <p:txBody>
-          <a:bodyPr wrap="square">
-            <a:spAutoFit/>
-          </a:bodyPr>
-          <a:lstStyle/>
-          <a:p>
-            <a:pPr algn="ctr"/>
-            <a:r>
-              <a:rPr sz="1400" b="1">
-                <a:solidFill>
-                  <a:srgbClr val="8E44AD"/>
-                </a:solidFill>
-                <a:latin typeface="Meiryo"/>
-              </a:rPr>
-              <a:t>▼</a:t>
+              <a:t>神経生理学的モデル（伸張反射）</a:t>
             </a:r>
           </a:p>
         </p:txBody>
@@ -27079,14 +26724,14 @@
         </p:nvSpPr>
         <p:spPr>
           <a:xfrm>
-            <a:off x="6400800" y="2971800"/>
+            <a:off x="6400800" y="1874519"/>
             <a:ext cx="5212080" cy="868680"/>
           </a:xfrm>
           <a:prstGeom prst="rect">
             <a:avLst/>
           </a:prstGeom>
           <a:solidFill>
-            <a:srgbClr val="9B59B6"/>
+            <a:srgbClr val="2E86C1"/>
           </a:solidFill>
           <a:ln>
             <a:solidFill>
@@ -27124,7 +26769,7 @@
         </p:nvSpPr>
         <p:spPr>
           <a:xfrm>
-            <a:off x="6446520" y="3044952"/>
+            <a:off x="6446520" y="1947672"/>
             <a:ext cx="5120640" cy="749808"/>
           </a:xfrm>
           <a:prstGeom prst="rect">
@@ -27146,8 +26791,8 @@
                 </a:solidFill>
                 <a:latin typeface="Meiryo"/>
               </a:rPr>
-              <a:t>筋紡錘が
-伸張を感知</a:t>
+              <a:t>筋が素早く
+引き伸ばされる</a:t>
             </a:r>
           </a:p>
         </p:txBody>
@@ -27160,7 +26805,7 @@
         </p:nvSpPr>
         <p:spPr>
           <a:xfrm>
-            <a:off x="8549640" y="3794760"/>
+            <a:off x="8549640" y="2697479"/>
             <a:ext cx="548640" cy="274320"/>
           </a:xfrm>
           <a:prstGeom prst="rect">
@@ -27195,14 +26840,14 @@
         </p:nvSpPr>
         <p:spPr>
           <a:xfrm>
-            <a:off x="6400800" y="4069079"/>
+            <a:off x="6400800" y="2971800"/>
             <a:ext cx="5212080" cy="868680"/>
           </a:xfrm>
           <a:prstGeom prst="rect">
             <a:avLst/>
           </a:prstGeom>
           <a:solidFill>
-            <a:srgbClr val="AF7AC5"/>
+            <a:srgbClr val="9B59B6"/>
           </a:solidFill>
           <a:ln>
             <a:solidFill>
@@ -27240,7 +26885,7 @@
         </p:nvSpPr>
         <p:spPr>
           <a:xfrm>
-            <a:off x="6446520" y="4142231"/>
+            <a:off x="6446520" y="3044952"/>
             <a:ext cx="5120640" cy="749808"/>
           </a:xfrm>
           <a:prstGeom prst="rect">
@@ -27262,8 +26907,8 @@
                 </a:solidFill>
                 <a:latin typeface="Meiryo"/>
               </a:rPr>
-              <a:t>脊髄へ信号
-を送る</a:t>
+              <a:t>筋紡錘が伸張の
+速さと大きさを感知</a:t>
             </a:r>
           </a:p>
         </p:txBody>
@@ -27276,7 +26921,7 @@
         </p:nvSpPr>
         <p:spPr>
           <a:xfrm>
-            <a:off x="8549640" y="4892040"/>
+            <a:off x="8549640" y="3794760"/>
             <a:ext cx="548640" cy="274320"/>
           </a:xfrm>
           <a:prstGeom prst="rect">
@@ -27311,14 +26956,14 @@
         </p:nvSpPr>
         <p:spPr>
           <a:xfrm>
-            <a:off x="6400800" y="5166359"/>
+            <a:off x="6400800" y="4069079"/>
             <a:ext cx="5212080" cy="868680"/>
           </a:xfrm>
           <a:prstGeom prst="rect">
             <a:avLst/>
           </a:prstGeom>
           <a:solidFill>
-            <a:srgbClr val="27AE60"/>
+            <a:srgbClr val="AF7AC5"/>
           </a:solidFill>
           <a:ln>
             <a:solidFill>
@@ -27356,6 +27001,122 @@
         </p:nvSpPr>
         <p:spPr>
           <a:xfrm>
+            <a:off x="6446520" y="4142231"/>
+            <a:ext cx="5120640" cy="749808"/>
+          </a:xfrm>
+          <a:prstGeom prst="rect">
+            <a:avLst/>
+          </a:prstGeom>
+          <a:noFill/>
+        </p:spPr>
+        <p:txBody>
+          <a:bodyPr wrap="square">
+            <a:spAutoFit/>
+          </a:bodyPr>
+          <a:lstStyle/>
+          <a:p>
+            <a:pPr algn="ctr"/>
+            <a:r>
+              <a:rPr sz="1300" b="1">
+                <a:solidFill>
+                  <a:srgbClr val="FFFFFF"/>
+                </a:solidFill>
+                <a:latin typeface="Meiryo"/>
+              </a:rPr>
+              <a:t>Ia線維で脊髄へ
+→ α運動神経へ中継</a:t>
+            </a:r>
+          </a:p>
+        </p:txBody>
+      </p:sp>
+      <p:sp>
+        <p:nvSpPr>
+          <p:cNvPr id="30" name="TextBox 29"/>
+          <p:cNvSpPr txBox="1"/>
+          <p:nvPr/>
+        </p:nvSpPr>
+        <p:spPr>
+          <a:xfrm>
+            <a:off x="8549640" y="4892040"/>
+            <a:ext cx="548640" cy="274320"/>
+          </a:xfrm>
+          <a:prstGeom prst="rect">
+            <a:avLst/>
+          </a:prstGeom>
+          <a:noFill/>
+        </p:spPr>
+        <p:txBody>
+          <a:bodyPr wrap="square">
+            <a:spAutoFit/>
+          </a:bodyPr>
+          <a:lstStyle/>
+          <a:p>
+            <a:pPr algn="ctr"/>
+            <a:r>
+              <a:rPr sz="1400" b="1">
+                <a:solidFill>
+                  <a:srgbClr val="8E44AD"/>
+                </a:solidFill>
+                <a:latin typeface="Meiryo"/>
+              </a:rPr>
+              <a:t>▼</a:t>
+            </a:r>
+          </a:p>
+        </p:txBody>
+      </p:sp>
+      <p:sp>
+        <p:nvSpPr>
+          <p:cNvPr id="31" name="Rectangle 30"/>
+          <p:cNvSpPr/>
+          <p:nvPr/>
+        </p:nvSpPr>
+        <p:spPr>
+          <a:xfrm>
+            <a:off x="6400800" y="5166359"/>
+            <a:ext cx="5212080" cy="868680"/>
+          </a:xfrm>
+          <a:prstGeom prst="rect">
+            <a:avLst/>
+          </a:prstGeom>
+          <a:solidFill>
+            <a:srgbClr val="27AE60"/>
+          </a:solidFill>
+          <a:ln>
+            <a:solidFill>
+              <a:srgbClr val="FFFFFF"/>
+            </a:solidFill>
+          </a:ln>
+        </p:spPr>
+        <p:style>
+          <a:lnRef idx="1">
+            <a:schemeClr val="accent1"/>
+          </a:lnRef>
+          <a:fillRef idx="3">
+            <a:schemeClr val="accent1"/>
+          </a:fillRef>
+          <a:effectRef idx="2">
+            <a:schemeClr val="accent1"/>
+          </a:effectRef>
+          <a:fontRef idx="minor">
+            <a:schemeClr val="lt1"/>
+          </a:fontRef>
+        </p:style>
+        <p:txBody>
+          <a:bodyPr rtlCol="0" anchor="ctr"/>
+          <a:lstStyle/>
+          <a:p>
+            <a:pPr algn="ctr"/>
+          </a:p>
+        </p:txBody>
+      </p:sp>
+      <p:sp>
+        <p:nvSpPr>
+          <p:cNvPr id="32" name="TextBox 31"/>
+          <p:cNvSpPr txBox="1"/>
+          <p:nvPr/>
+        </p:nvSpPr>
+        <p:spPr>
+          <a:xfrm>
             <a:off x="6446520" y="5239512"/>
             <a:ext cx="5120640" cy="749808"/>
           </a:xfrm>
@@ -27378,22 +27139,22 @@
                 </a:solidFill>
                 <a:latin typeface="Meiryo"/>
               </a:rPr>
-              <a:t>筋肉が即座に
-収縮・力発揮！</a:t>
-            </a:r>
-          </a:p>
-        </p:txBody>
-      </p:sp>
-      <p:sp>
-        <p:nvSpPr>
-          <p:cNvPr id="30" name="TextBox 29"/>
-          <p:cNvSpPr txBox="1"/>
-          <p:nvPr/>
-        </p:nvSpPr>
-        <p:spPr>
-          <a:xfrm>
-            <a:off x="6263640" y="6126480"/>
-            <a:ext cx="5486400" cy="502920"/>
+              <a:t>主働筋が反射的に
+収縮・力が増す</a:t>
+            </a:r>
+          </a:p>
+        </p:txBody>
+      </p:sp>
+      <p:sp>
+        <p:nvSpPr>
+          <p:cNvPr id="33" name="TextBox 32"/>
+          <p:cNvSpPr txBox="1"/>
+          <p:nvPr/>
+        </p:nvSpPr>
+        <p:spPr>
+          <a:xfrm>
+            <a:off x="6263640" y="6172200"/>
+            <a:ext cx="5486400" cy="365760"/>
           </a:xfrm>
           <a:prstGeom prst="rect">
             <a:avLst/>
@@ -27408,14 +27169,13 @@
           <a:p>
             <a:pPr algn="l"/>
             <a:r>
-              <a:rPr sz="1200" b="1">
+              <a:rPr sz="1100" b="1">
                 <a:solidFill>
                   <a:srgbClr val="8E44AD"/>
                 </a:solidFill>
                 <a:latin typeface="Meiryo"/>
               </a:rPr>
-              <a:t>この反射を鍛えることで
-より素早く・より強い反応が得られる</a:t>
+              <a:t>伸張から短縮までが長すぎると、反射による上乗せは得られない</a:t>
             </a:r>
           </a:p>
         </p:txBody>
@@ -27843,7 +27603,7 @@
                 </a:solidFill>
                 <a:latin typeface="Meiryo"/>
               </a:rPr>
-              <a:t>1. 競技種目の特性（どんな動きが必要か）</a:t>
+              <a:t>1. 競技（どんな動き・ケガのリスクがあるか）</a:t>
             </a:r>
           </a:p>
         </p:txBody>
@@ -27923,7 +27683,7 @@
                 </a:solidFill>
                 <a:latin typeface="Meiryo"/>
               </a:rPr>
-              <a:t>2. ポジションの要求</a:t>
+              <a:t>2. ポジション（求められる能力）</a:t>
             </a:r>
           </a:p>
         </p:txBody>
@@ -28003,7 +27763,7 @@
                 </a:solidFill>
                 <a:latin typeface="Meiryo"/>
               </a:rPr>
-              <a:t>3. 現在のフィジカルレベル</a:t>
+              <a:t>3. トレーニング状態（プライオの経験）</a:t>
             </a:r>
           </a:p>
         </p:txBody>
@@ -28083,7 +27843,7 @@
                 </a:solidFill>
                 <a:latin typeface="Meiryo"/>
               </a:rPr>
-              <a:t>4. プライオメトリクスのトレーニング歴</a:t>
+              <a:t>4. ケガの既往・現在の状態</a:t>
             </a:r>
           </a:p>
         </p:txBody>
@@ -28368,7 +28128,7 @@
                 </a:solidFill>
                 <a:latin typeface="Meiryo"/>
               </a:rPr>
-              <a:t>週2〜3回</a:t>
+              <a:t>週1〜3回（セッション間48〜72時間）</a:t>
             </a:r>
           </a:p>
         </p:txBody>
@@ -28448,7 +28208,7 @@
                 </a:solidFill>
                 <a:latin typeface="Meiryo"/>
               </a:rPr>
-              <a:t>回復</a:t>
+              <a:t>運動‐休息比</a:t>
             </a:r>
           </a:p>
         </p:txBody>
@@ -28528,7 +28288,7 @@
                 </a:solidFill>
                 <a:latin typeface="Meiryo"/>
               </a:rPr>
-              <a:t>48時間以上/セッション間</a:t>
+              <a:t>1:5〜1:10</a:t>
             </a:r>
           </a:p>
         </p:txBody>
@@ -28848,7 +28608,7 @@
                 </a:solidFill>
                 <a:latin typeface="Meiryo"/>
               </a:rPr>
-              <a:t>80〜100回/セッション</a:t>
+              <a:t>開始時 80〜100 接地/セッション</a:t>
             </a:r>
           </a:p>
         </p:txBody>
@@ -29008,7 +28768,7 @@
                 </a:solidFill>
                 <a:latin typeface="Meiryo"/>
               </a:rPr>
-              <a:t>100〜120回/セッション</a:t>
+              <a:t>開始時 100〜120 接地/セッション</a:t>
             </a:r>
           </a:p>
         </p:txBody>
@@ -29168,7 +28928,7 @@
                 </a:solidFill>
                 <a:latin typeface="Meiryo"/>
               </a:rPr>
-              <a:t>120〜140回/セッション</a:t>
+              <a:t>開始時 120〜140 接地/セッション</a:t>
             </a:r>
           </a:p>
         </p:txBody>
@@ -29676,7 +29436,7 @@
                 </a:solidFill>
                 <a:latin typeface="Meiryo"/>
               </a:rPr>
-              <a:t>● アンクルホップ（両脚・片脚）</a:t>
+              <a:t>● スキップ・パワースキップ</a:t>
             </a:r>
           </a:p>
         </p:txBody>
@@ -29756,7 +29516,7 @@
                 </a:solidFill>
                 <a:latin typeface="Meiryo"/>
               </a:rPr>
-              <a:t>● スクワットジャンプ</a:t>
+              <a:t>● アンクルホップ（両脚）</a:t>
             </a:r>
           </a:p>
         </p:txBody>
@@ -29836,7 +29596,7 @@
                 </a:solidFill>
                 <a:latin typeface="Meiryo"/>
               </a:rPr>
-              <a:t>● ジャンプ＆リーチ</a:t>
+              <a:t>● スクワットジャンプ</a:t>
             </a:r>
           </a:p>
         </p:txBody>
@@ -29916,7 +29676,7 @@
                 </a:solidFill>
                 <a:latin typeface="Meiryo"/>
               </a:rPr>
-              <a:t>● スキップ</a:t>
+              <a:t>● 立ち幅跳び</a:t>
             </a:r>
           </a:p>
         </p:txBody>
@@ -30201,7 +29961,7 @@
                 </a:solidFill>
                 <a:latin typeface="Meiryo"/>
               </a:rPr>
-              <a:t>● タックジャンプ</a:t>
+              <a:t>● タックジャンプ（両脚）</a:t>
             </a:r>
           </a:p>
         </p:txBody>
@@ -30281,7 +30041,7 @@
                 </a:solidFill>
                 <a:latin typeface="Meiryo"/>
               </a:rPr>
-              <a:t>● バーティカルジャンプ</a:t>
+              <a:t>● 障害物飛び越え</a:t>
             </a:r>
           </a:p>
         </p:txBody>
@@ -30361,7 +30121,7 @@
                 </a:solidFill>
                 <a:latin typeface="Meiryo"/>
               </a:rPr>
-              <a:t>● ボックスジャンプ</a:t>
+              <a:t>● ダブルレッグ・ホップ</a:t>
             </a:r>
           </a:p>
         </p:txBody>
@@ -30441,7 +30201,7 @@
                 </a:solidFill>
                 <a:latin typeface="Meiryo"/>
               </a:rPr>
-              <a:t>● ダブルレッグ・ホップ</a:t>
+              <a:t>● バリアホップ</a:t>
             </a:r>
           </a:p>
         </p:txBody>
@@ -30601,7 +30361,7 @@
                 </a:solidFill>
                 <a:latin typeface="Meiryo"/>
               </a:rPr>
-              <a:t>大きな衝撃・高さあり</a:t>
+              <a:t>大きな衝撃</a:t>
             </a:r>
           </a:p>
         </p:txBody>
@@ -30726,7 +30486,7 @@
                 </a:solidFill>
                 <a:latin typeface="Meiryo"/>
               </a:rPr>
-              <a:t>● デプスジャンプ（最高強度）</a:t>
+              <a:t>● デプスジャンプ</a:t>
             </a:r>
           </a:p>
         </p:txBody>
@@ -30806,7 +30566,7 @@
                 </a:solidFill>
                 <a:latin typeface="Meiryo"/>
               </a:rPr>
-              <a:t>● シングルレッグ系</a:t>
+              <a:t>● 片脚の垂直跳び・ホップ</a:t>
             </a:r>
           </a:p>
         </p:txBody>
@@ -30966,7 +30726,7 @@
                 </a:solidFill>
                 <a:latin typeface="Meiryo"/>
               </a:rPr>
-              <a:t>● バイクジャンプ</a:t>
+              <a:t>● パイクジャンプ</a:t>
             </a:r>
           </a:p>
         </p:txBody>
@@ -31046,7 +30806,7 @@
                 </a:solidFill>
                 <a:latin typeface="Meiryo"/>
               </a:rPr>
-              <a:t>強度に影響する要因：体重（重いほど増）/ スピード（速いほど増）/ ドリルの高さ（高いほど増）</a:t>
+              <a:t>強度に影響する要因：接地点（片脚＞両脚）/ スピード / ドリルの高さ / 体重　※強度を上げたら量を減らす</a:t>
             </a:r>
           </a:p>
         </p:txBody>
@@ -31429,7 +31189,7 @@
                 </a:solidFill>
                 <a:latin typeface="Meiryo"/>
               </a:rPr>
-              <a:t>姿勢・ポジションの確認</a:t>
+              <a:t>選手の評価</a:t>
             </a:r>
           </a:p>
         </p:txBody>
@@ -31464,7 +31224,7 @@
                 </a:solidFill>
                 <a:latin typeface="Meiryo"/>
               </a:rPr>
-              <a:t>アライメントと適切なポジションを確認する</a:t>
+              <a:t>競技歴・トレーニング歴を含めて選手を評価する</a:t>
             </a:r>
           </a:p>
         </p:txBody>
@@ -31624,7 +31384,7 @@
                 </a:solidFill>
                 <a:latin typeface="Meiryo"/>
               </a:rPr>
-              <a:t>ニーズに合ったデザイン確認</a:t>
+              <a:t>目標の設定</a:t>
             </a:r>
           </a:p>
         </p:txBody>
@@ -31659,7 +31419,7 @@
                 </a:solidFill>
                 <a:latin typeface="Meiryo"/>
               </a:rPr>
-              <a:t>競技・ポジションに合ったプライオメトリクスのデザインを確認</a:t>
+              <a:t>競技・ポジション・選手個人に合った目標を決める</a:t>
             </a:r>
           </a:p>
         </p:txBody>
@@ -31854,7 +31614,7 @@
                 </a:solidFill>
                 <a:latin typeface="Meiryo"/>
               </a:rPr>
-              <a:t>強度・回数・量・期間・ウォームアップを設計する</a:t>
+              <a:t>強度・頻度・回復・量・期間を設定する</a:t>
             </a:r>
           </a:p>
         </p:txBody>
@@ -32014,7 +31774,7 @@
                 </a:solidFill>
                 <a:latin typeface="Meiryo"/>
               </a:rPr>
-              <a:t>選手への説明と教示</a:t>
+              <a:t>テクニックの指導</a:t>
             </a:r>
           </a:p>
         </p:txBody>
@@ -32049,7 +31809,7 @@
                 </a:solidFill>
                 <a:latin typeface="Meiryo"/>
               </a:rPr>
-              <a:t>適切なテクニックと安全事項を指導する</a:t>
+              <a:t>ジャンプ・着地・投てきの正しいテクニックを指導する</a:t>
             </a:r>
           </a:p>
         </p:txBody>
@@ -32209,7 +31969,7 @@
                 </a:solidFill>
                 <a:latin typeface="Meiryo"/>
               </a:rPr>
-              <a:t>実施と継続的評価</a:t>
+              <a:t>適切に進める</a:t>
             </a:r>
           </a:p>
         </p:txBody>
@@ -32244,7 +32004,7 @@
                 </a:solidFill>
                 <a:latin typeface="Meiryo"/>
               </a:rPr>
-              <a:t>プログラムを実施しながら漸進性に従って更新する</a:t>
+              <a:t>プログラムを漸進的に進めていく</a:t>
             </a:r>
           </a:p>
         </p:txBody>
@@ -32627,8 +32387,8 @@
                 </a:solidFill>
                 <a:latin typeface="Meiryo"/>
               </a:rPr>
-              <a:t>ランニング動作の準備
-股関節動作を調整する</a:t>
+              <a:t>ランニング動作をまねる
+姿勢と動作テクニックを強調</a:t>
             </a:r>
           </a:p>
         </p:txBody>
@@ -32788,8 +32548,9 @@
                 </a:solidFill>
                 <a:latin typeface="Meiryo"/>
               </a:rPr>
-              <a:t>下半身の連続動作の準備
-軽いペースで継続</a:t>
+              <a:t>着地の衝撃への準備
+つま先・ストレートレッグ
+バットキック</a:t>
             </a:r>
           </a:p>
         </p:txBody>
@@ -32949,8 +32710,8 @@
                 </a:solidFill>
                 <a:latin typeface="Meiryo"/>
               </a:rPr>
-              <a:t>上肢の反動動作の準備
-リズミカルな連続動作</a:t>
+              <a:t>腕と脚の交互の動き
+素早い離地と着地</a:t>
             </a:r>
           </a:p>
         </p:txBody>
@@ -33111,7 +32872,7 @@
                 <a:latin typeface="Meiryo"/>
               </a:rPr>
               <a:t>方向転換の準備
-素早い足の動きを意識</a:t>
+シャトル・シャッフルなど</a:t>
             </a:r>
           </a:p>
         </p:txBody>
@@ -33271,8 +33032,8 @@
                 </a:solidFill>
                 <a:latin typeface="Meiryo"/>
               </a:rPr>
-              <a:t>大腿・臀部の動的ストレッチ
-フォワードステップ形式</a:t>
+              <a:t>フォワードステップが基本
+前方・側方・後方にも</a:t>
             </a:r>
           </a:p>
         </p:txBody>
